--- a/evaluation/dashboard/public/decks/uxl-onednn-maintainer-briefing.pptx
+++ b/evaluation/dashboard/public/decks/uxl-onednn-maintainer-briefing.pptx
@@ -2,20 +2,19 @@
 <file path=ppt/presentation.xml><?xml version="1.0" encoding="utf-8"?>
 <p:presentation xmlns:p="http://schemas.openxmlformats.org/presentationml/2006/main">
   <p:sldMasterIdLst>
-    <p:sldMasterId xmlns:r="http://schemas.openxmlformats.org/officeDocument/2006/relationships" id="2147483648" r:id="Rda055c04e9be4302"/>
-    <p:sldMasterId xmlns:r="http://schemas.openxmlformats.org/officeDocument/2006/relationships" id="2147483665" r:id="Ra308b6c0e6ea41de"/>
+    <p:sldMasterId xmlns:r="http://schemas.openxmlformats.org/officeDocument/2006/relationships" id="2147483648" r:id="Rd6795c5cc81c4911"/>
+    <p:sldMasterId xmlns:r="http://schemas.openxmlformats.org/officeDocument/2006/relationships" id="2147483665" r:id="R4cd733412c68464b"/>
   </p:sldMasterIdLst>
   <p:notesMasterIdLst>
-    <p:notesMasterId xmlns:r="http://schemas.openxmlformats.org/officeDocument/2006/relationships" r:id="Ra56770afb37449c9"/>
+    <p:notesMasterId xmlns:r="http://schemas.openxmlformats.org/officeDocument/2006/relationships" r:id="Rd644cd14a89f47db"/>
   </p:notesMasterIdLst>
   <p:sldIdLst>
-    <p:sldId xmlns:r="http://schemas.openxmlformats.org/officeDocument/2006/relationships" id="256" r:id="Rbd08e2a257e84a1b"/>
-    <p:sldId xmlns:r="http://schemas.openxmlformats.org/officeDocument/2006/relationships" id="257" r:id="R75990e5f9dd740b1"/>
-    <p:sldId xmlns:r="http://schemas.openxmlformats.org/officeDocument/2006/relationships" id="258" r:id="Rcae41c2daa2a4237"/>
-    <p:sldId xmlns:r="http://schemas.openxmlformats.org/officeDocument/2006/relationships" id="259" r:id="R394d5eab4a724549"/>
-    <p:sldId xmlns:r="http://schemas.openxmlformats.org/officeDocument/2006/relationships" id="260" r:id="R7a8ffb5d5c8a4cd1"/>
-    <p:sldId xmlns:r="http://schemas.openxmlformats.org/officeDocument/2006/relationships" id="261" r:id="R42f529a41c76403a"/>
-    <p:sldId xmlns:r="http://schemas.openxmlformats.org/officeDocument/2006/relationships" id="262" r:id="R2dac5efd41664102"/>
+    <p:sldId xmlns:r="http://schemas.openxmlformats.org/officeDocument/2006/relationships" id="256" r:id="R54ee7843c9564143"/>
+    <p:sldId xmlns:r="http://schemas.openxmlformats.org/officeDocument/2006/relationships" id="257" r:id="R266d59f542ec4151"/>
+    <p:sldId xmlns:r="http://schemas.openxmlformats.org/officeDocument/2006/relationships" id="258" r:id="R2de3ade53eb640e0"/>
+    <p:sldId xmlns:r="http://schemas.openxmlformats.org/officeDocument/2006/relationships" id="259" r:id="Rb80754d677a64495"/>
+    <p:sldId xmlns:r="http://schemas.openxmlformats.org/officeDocument/2006/relationships" id="260" r:id="R0e0c4ad72274489e"/>
+    <p:sldId xmlns:r="http://schemas.openxmlformats.org/officeDocument/2006/relationships" id="261" r:id="R4a654da48a1547d8"/>
   </p:sldIdLst>
   <p:sldSz cx="12192000" cy="6858000"/>
   <p:notesSz cx="6858000" cy="9144000"/>
@@ -619,7 +618,7 @@
           </a:p>
           <a:p xmlns:a="http://schemas.openxmlformats.org/drawingml/2006/main">
             <a:r>
-              <a:t>Speaker cue: Why this is useful to oneDNN at first glance</a:t>
+              <a:t>Speaker cue: What the skill tells an agent today</a:t>
             </a:r>
           </a:p>
         </p:txBody>
@@ -724,7 +723,7 @@
           </a:p>
           <a:p xmlns:a="http://schemas.openxmlformats.org/drawingml/2006/main">
             <a:r>
-              <a:t>Speaker cue: What the skill tells an agent today</a:t>
+              <a:t>Speaker cue: Evaluation inventory: 5 implemented, 1 honest gap</a:t>
             </a:r>
           </a:p>
         </p:txBody>
@@ -829,7 +828,7 @@
           </a:p>
           <a:p xmlns:a="http://schemas.openxmlformats.org/drawingml/2006/main">
             <a:r>
-              <a:t>Speaker cue: Evaluation inventory: 5 implemented, 1 honest gap</a:t>
+              <a:t>Speaker cue: How we chose the content</a:t>
             </a:r>
           </a:p>
         </p:txBody>
@@ -934,7 +933,7 @@
           </a:p>
           <a:p xmlns:a="http://schemas.openxmlformats.org/drawingml/2006/main">
             <a:r>
-              <a:t>Speaker cue: How we chose the content</a:t>
+              <a:t>Speaker cue: What project ownership would look like</a:t>
             </a:r>
           </a:p>
         </p:txBody>
@@ -965,111 +964,6 @@
 </file>
 
 <file path=ppt/notesSlides/notesSlide6.xml><?xml version="1.0" encoding="utf-8"?>
-<p:notes xmlns:p="http://schemas.openxmlformats.org/presentationml/2006/main">
-  <p:cSld>
-    <p:spTree>
-      <p:nvGrpSpPr>
-        <p:cNvPr id="1" name=""/>
-        <p:cNvGrpSpPr/>
-        <p:nvPr/>
-      </p:nvGrpSpPr>
-      <p:grpSpPr>
-        <a:xfrm xmlns:a="http://schemas.openxmlformats.org/drawingml/2006/main"/>
-      </p:grpSpPr>
-      <p:sp>
-        <p:nvSpPr>
-          <p:cNvPr id="2" name="Slide Image Placeholder 1"/>
-          <p:cNvSpPr>
-            <a:spLocks xmlns:a="http://schemas.openxmlformats.org/drawingml/2006/main" noGrp="1"/>
-          </p:cNvSpPr>
-          <p:nvPr>
-            <p:ph type="sldImg" idx="0"/>
-          </p:nvPr>
-        </p:nvSpPr>
-        <p:spPr/>
-      </p:sp>
-      <p:sp>
-        <p:nvSpPr>
-          <p:cNvPr id="3" name="Notes Placeholder 2"/>
-          <p:cNvSpPr>
-            <a:spLocks xmlns:a="http://schemas.openxmlformats.org/drawingml/2006/main" noGrp="1"/>
-          </p:cNvSpPr>
-          <p:nvPr>
-            <p:ph type="body" idx="1"/>
-          </p:nvPr>
-        </p:nvSpPr>
-        <p:spPr/>
-        <p:txBody>
-          <a:bodyPr xmlns:a="http://schemas.openxmlformats.org/drawingml/2006/main"/>
-          <a:lstStyle xmlns:a="http://schemas.openxmlformats.org/drawingml/2006/main"/>
-          <a:p xmlns:a="http://schemas.openxmlformats.org/drawingml/2006/main">
-            <a:r>
-              <a:t>[Sources]</a:t>
-            </a:r>
-          </a:p>
-          <a:p xmlns:a="http://schemas.openxmlformats.org/drawingml/2006/main">
-            <a:r>
-              <a:t>- https://github.com/uxlfoundation/skills/tree/main/skills/uxl-onednn</a:t>
-            </a:r>
-          </a:p>
-          <a:p xmlns:a="http://schemas.openxmlformats.org/drawingml/2006/main">
-            <a:r>
-              <a:t>- https://github.com/uxlfoundation/skills/blob/main/skill-cards/uxl-onednn.md</a:t>
-            </a:r>
-          </a:p>
-          <a:p xmlns:a="http://schemas.openxmlformats.org/drawingml/2006/main">
-            <a:r>
-              <a:t>- https://github.com/uxlfoundation/skills/blob/main/docs/maintainer-review/uxl-onednn.md</a:t>
-            </a:r>
-          </a:p>
-          <a:p xmlns:a="http://schemas.openxmlformats.org/drawingml/2006/main">
-            <a:r>
-              <a:t>- https://github.com/uxlfoundation/skills/blob/main/evaluation/harbor/suites.json</a:t>
-            </a:r>
-          </a:p>
-          <a:p xmlns:a="http://schemas.openxmlformats.org/drawingml/2006/main">
-            <a:r>
-              <a:t>[/Sources]</a:t>
-            </a:r>
-          </a:p>
-          <a:p xmlns:a="http://schemas.openxmlformats.org/drawingml/2006/main">
-            <a:r>
-              <a:t/>
-            </a:r>
-          </a:p>
-          <a:p xmlns:a="http://schemas.openxmlformats.org/drawingml/2006/main">
-            <a:r>
-              <a:t>Speaker cue: What project ownership would look like</a:t>
-            </a:r>
-          </a:p>
-        </p:txBody>
-      </p:sp>
-      <p:sp>
-        <p:nvSpPr>
-          <p:cNvPr id="4" name="Slide Number Placeholder 3"/>
-          <p:cNvSpPr>
-            <a:spLocks xmlns:a="http://schemas.openxmlformats.org/drawingml/2006/main" noGrp="1"/>
-          </p:cNvSpPr>
-          <p:nvPr>
-            <p:ph type="sldNum" idx="5"/>
-          </p:nvPr>
-        </p:nvSpPr>
-        <p:spPr/>
-        <p:txBody>
-          <a:bodyPr xmlns:a="http://schemas.openxmlformats.org/drawingml/2006/main"/>
-          <a:lstStyle xmlns:a="http://schemas.openxmlformats.org/drawingml/2006/main"/>
-          <a:p xmlns:a="http://schemas.openxmlformats.org/drawingml/2006/main"/>
-        </p:txBody>
-      </p:sp>
-    </p:spTree>
-  </p:cSld>
-  <p:clrMapOvr>
-    <a:masterClrMapping xmlns:a="http://schemas.openxmlformats.org/drawingml/2006/main"/>
-  </p:clrMapOvr>
-</p:notes>
-</file>
-
-<file path=ppt/notesSlides/notesSlide7.xml><?xml version="1.0" encoding="utf-8"?>
 <p:notes xmlns:p="http://schemas.openxmlformats.org/presentationml/2006/main">
   <p:cSld>
     <p:spTree>
@@ -1180,7 +1074,7 @@
     <p:bg>
       <p:bgPr>
         <a:blipFill xmlns:a="http://schemas.openxmlformats.org/drawingml/2006/main">
-          <a:blip xmlns:r="http://schemas.openxmlformats.org/officeDocument/2006/relationships" r:embed="R56d623ad32c443ea">
+          <a:blip xmlns:r="http://schemas.openxmlformats.org/officeDocument/2006/relationships" r:embed="R07c2f19dcfd04ffe">
             <a:alphaModFix/>
           </a:blip>
           <a:stretch>
@@ -1615,7 +1509,7 @@
           <p:nvPr/>
         </p:nvPicPr>
         <p:blipFill rotWithShape="1">
-          <a:blip xmlns:r="http://schemas.openxmlformats.org/officeDocument/2006/relationships" xmlns:a="http://schemas.openxmlformats.org/drawingml/2006/main" r:embed="R7ac5b42fb9834583">
+          <a:blip xmlns:r="http://schemas.openxmlformats.org/officeDocument/2006/relationships" xmlns:a="http://schemas.openxmlformats.org/drawingml/2006/main" r:embed="R898ae0159eab4657">
             <a:alphaModFix/>
           </a:blip>
           <a:srcRect xmlns:a="http://schemas.openxmlformats.org/drawingml/2006/main" l="0" t="0" r="0" b="0"/>
@@ -1645,7 +1539,7 @@
     <p:bg>
       <p:bgPr>
         <a:blipFill xmlns:a="http://schemas.openxmlformats.org/drawingml/2006/main">
-          <a:blip xmlns:r="http://schemas.openxmlformats.org/officeDocument/2006/relationships" r:embed="Rf7d2dae173da4644">
+          <a:blip xmlns:r="http://schemas.openxmlformats.org/officeDocument/2006/relationships" r:embed="R7fc7392b8ff645a6">
             <a:alphaModFix/>
           </a:blip>
           <a:stretch>
@@ -2679,7 +2573,7 @@
           <p:nvPr/>
         </p:nvPicPr>
         <p:blipFill rotWithShape="1">
-          <a:blip xmlns:r="http://schemas.openxmlformats.org/officeDocument/2006/relationships" xmlns:a="http://schemas.openxmlformats.org/drawingml/2006/main" r:embed="Rc459b5054f954251">
+          <a:blip xmlns:r="http://schemas.openxmlformats.org/officeDocument/2006/relationships" xmlns:a="http://schemas.openxmlformats.org/drawingml/2006/main" r:embed="Rf5ab2bee4aed49b1">
             <a:alphaModFix/>
           </a:blip>
           <a:srcRect xmlns:a="http://schemas.openxmlformats.org/drawingml/2006/main" l="0" t="0" r="0" b="0"/>
@@ -3703,7 +3597,7 @@
           <p:nvPr/>
         </p:nvPicPr>
         <p:blipFill rotWithShape="1">
-          <a:blip xmlns:r="http://schemas.openxmlformats.org/officeDocument/2006/relationships" xmlns:a="http://schemas.openxmlformats.org/drawingml/2006/main" r:embed="Rc5509cb4aed744be">
+          <a:blip xmlns:r="http://schemas.openxmlformats.org/officeDocument/2006/relationships" xmlns:a="http://schemas.openxmlformats.org/drawingml/2006/main" r:embed="Rd0f3deb44092408b">
             <a:alphaModFix/>
           </a:blip>
           <a:srcRect xmlns:a="http://schemas.openxmlformats.org/drawingml/2006/main" l="0" t="0" r="0" b="0"/>
@@ -3733,7 +3627,7 @@
     <p:bg>
       <p:bgPr>
         <a:blipFill xmlns:a="http://schemas.openxmlformats.org/drawingml/2006/main">
-          <a:blip xmlns:r="http://schemas.openxmlformats.org/officeDocument/2006/relationships" r:embed="Rec6e7dbd37b14254">
+          <a:blip xmlns:r="http://schemas.openxmlformats.org/officeDocument/2006/relationships" r:embed="R2101135c1cbf4430">
             <a:alphaModFix/>
           </a:blip>
           <a:stretch>
@@ -5007,7 +4901,7 @@
           <p:nvPr/>
         </p:nvPicPr>
         <p:blipFill rotWithShape="1">
-          <a:blip xmlns:r="http://schemas.openxmlformats.org/officeDocument/2006/relationships" xmlns:a="http://schemas.openxmlformats.org/drawingml/2006/main" r:embed="R6f02d2f209d64789">
+          <a:blip xmlns:r="http://schemas.openxmlformats.org/officeDocument/2006/relationships" xmlns:a="http://schemas.openxmlformats.org/drawingml/2006/main" r:embed="Ra7803394a379485d">
             <a:alphaModFix/>
           </a:blip>
           <a:srcRect xmlns:a="http://schemas.openxmlformats.org/drawingml/2006/main" l="0" t="0" r="0" b="0"/>
@@ -8251,7 +8145,7 @@
           <p:nvPr/>
         </p:nvPicPr>
         <p:blipFill rotWithShape="1">
-          <a:blip xmlns:r="http://schemas.openxmlformats.org/officeDocument/2006/relationships" xmlns:a="http://schemas.openxmlformats.org/drawingml/2006/main" r:embed="R477f7504cef1496c">
+          <a:blip xmlns:r="http://schemas.openxmlformats.org/officeDocument/2006/relationships" xmlns:a="http://schemas.openxmlformats.org/drawingml/2006/main" r:embed="R5266cc39b1914b62">
             <a:alphaModFix/>
           </a:blip>
           <a:srcRect xmlns:a="http://schemas.openxmlformats.org/drawingml/2006/main" l="0" t="0" r="0" b="0"/>
@@ -9989,7 +9883,7 @@
           <p:nvPr/>
         </p:nvPicPr>
         <p:blipFill rotWithShape="1">
-          <a:blip xmlns:r="http://schemas.openxmlformats.org/officeDocument/2006/relationships" xmlns:a="http://schemas.openxmlformats.org/drawingml/2006/main" r:embed="Re71243e151ac473f">
+          <a:blip xmlns:r="http://schemas.openxmlformats.org/officeDocument/2006/relationships" xmlns:a="http://schemas.openxmlformats.org/drawingml/2006/main" r:embed="R11fa2d2b8d7e4498">
             <a:alphaModFix/>
           </a:blip>
           <a:srcRect xmlns:a="http://schemas.openxmlformats.org/drawingml/2006/main" l="0" t="0" r="0" b="0"/>
@@ -16818,7 +16712,7 @@
     <p:bg>
       <p:bgPr>
         <a:blipFill xmlns:a="http://schemas.openxmlformats.org/drawingml/2006/main">
-          <a:blip xmlns:r="http://schemas.openxmlformats.org/officeDocument/2006/relationships" r:embed="R183ad2a43d3140fa">
+          <a:blip xmlns:r="http://schemas.openxmlformats.org/officeDocument/2006/relationships" r:embed="Re4d5c989497b4dc4">
             <a:alphaModFix/>
           </a:blip>
           <a:stretch>
@@ -17253,7 +17147,7 @@
           <p:nvPr/>
         </p:nvPicPr>
         <p:blipFill rotWithShape="1">
-          <a:blip xmlns:r="http://schemas.openxmlformats.org/officeDocument/2006/relationships" xmlns:a="http://schemas.openxmlformats.org/drawingml/2006/main" r:embed="Rac2677064d6c4c4d">
+          <a:blip xmlns:r="http://schemas.openxmlformats.org/officeDocument/2006/relationships" xmlns:a="http://schemas.openxmlformats.org/drawingml/2006/main" r:embed="R780d07d36af94edc">
             <a:alphaModFix/>
           </a:blip>
           <a:srcRect xmlns:a="http://schemas.openxmlformats.org/drawingml/2006/main" l="0" t="0" r="0" b="0"/>
@@ -17283,7 +17177,7 @@
     <p:bg>
       <p:bgPr>
         <a:blipFill xmlns:a="http://schemas.openxmlformats.org/drawingml/2006/main">
-          <a:blip xmlns:r="http://schemas.openxmlformats.org/officeDocument/2006/relationships" r:embed="R50d9b19e85da4226">
+          <a:blip xmlns:r="http://schemas.openxmlformats.org/officeDocument/2006/relationships" r:embed="R81954e6a259a4e08">
             <a:alphaModFix/>
           </a:blip>
           <a:stretch>
@@ -17916,7 +17810,7 @@
           <p:nvPr/>
         </p:nvPicPr>
         <p:blipFill rotWithShape="1">
-          <a:blip xmlns:r="http://schemas.openxmlformats.org/officeDocument/2006/relationships" xmlns:a="http://schemas.openxmlformats.org/drawingml/2006/main" r:embed="R1415cf496af742cf">
+          <a:blip xmlns:r="http://schemas.openxmlformats.org/officeDocument/2006/relationships" xmlns:a="http://schemas.openxmlformats.org/drawingml/2006/main" r:embed="R98ce9d68c31347ce">
             <a:alphaModFix/>
           </a:blip>
           <a:srcRect xmlns:a="http://schemas.openxmlformats.org/drawingml/2006/main" l="0" t="0" r="0" b="0"/>
@@ -18376,7 +18270,7 @@
     <p:bg>
       <p:bgPr>
         <a:blipFill xmlns:a="http://schemas.openxmlformats.org/drawingml/2006/main">
-          <a:blip xmlns:r="http://schemas.openxmlformats.org/officeDocument/2006/relationships" r:embed="R7a18eeb8df97495c">
+          <a:blip xmlns:r="http://schemas.openxmlformats.org/officeDocument/2006/relationships" r:embed="R4f1269770cba4e6a">
             <a:alphaModFix/>
           </a:blip>
           <a:stretch>
@@ -19009,7 +18903,7 @@
           <p:nvPr/>
         </p:nvPicPr>
         <p:blipFill rotWithShape="1">
-          <a:blip xmlns:r="http://schemas.openxmlformats.org/officeDocument/2006/relationships" xmlns:a="http://schemas.openxmlformats.org/drawingml/2006/main" r:embed="Rbe3e73b66fee4754">
+          <a:blip xmlns:r="http://schemas.openxmlformats.org/officeDocument/2006/relationships" xmlns:a="http://schemas.openxmlformats.org/drawingml/2006/main" r:embed="R28eb6379b7024d78">
             <a:alphaModFix/>
           </a:blip>
           <a:srcRect xmlns:a="http://schemas.openxmlformats.org/drawingml/2006/main" l="0" t="0" r="0" b="0"/>
@@ -21665,7 +21559,7 @@
           <p:nvPr/>
         </p:nvPicPr>
         <p:blipFill rotWithShape="1">
-          <a:blip xmlns:r="http://schemas.openxmlformats.org/officeDocument/2006/relationships" xmlns:a="http://schemas.openxmlformats.org/drawingml/2006/main" r:embed="Rb8722f2eafe44fa6">
+          <a:blip xmlns:r="http://schemas.openxmlformats.org/officeDocument/2006/relationships" xmlns:a="http://schemas.openxmlformats.org/drawingml/2006/main" r:embed="R085d0573cfad4a10">
             <a:alphaModFix/>
           </a:blip>
           <a:srcRect xmlns:a="http://schemas.openxmlformats.org/drawingml/2006/main" l="0" t="0" r="0" b="0"/>
@@ -21695,7 +21589,7 @@
     <p:bg>
       <p:bgPr>
         <a:blipFill xmlns:a="http://schemas.openxmlformats.org/drawingml/2006/main">
-          <a:blip xmlns:r="http://schemas.openxmlformats.org/officeDocument/2006/relationships" r:embed="Rd8427d155ae645e6">
+          <a:blip xmlns:r="http://schemas.openxmlformats.org/officeDocument/2006/relationships" r:embed="Rdd73b954025f4cb0">
             <a:alphaModFix/>
           </a:blip>
           <a:stretch>
@@ -22539,7 +22433,7 @@
           <p:nvPr/>
         </p:nvPicPr>
         <p:blipFill rotWithShape="1">
-          <a:blip xmlns:r="http://schemas.openxmlformats.org/officeDocument/2006/relationships" xmlns:a="http://schemas.openxmlformats.org/drawingml/2006/main" r:embed="R731ce5c895934c8c">
+          <a:blip xmlns:r="http://schemas.openxmlformats.org/officeDocument/2006/relationships" xmlns:a="http://schemas.openxmlformats.org/drawingml/2006/main" r:embed="R47c95dde93ac484a">
             <a:alphaModFix/>
           </a:blip>
           <a:srcRect xmlns:a="http://schemas.openxmlformats.org/drawingml/2006/main" l="0" t="0" r="0" b="0"/>
@@ -22569,7 +22463,7 @@
     <p:bg>
       <p:bgPr>
         <a:blipFill xmlns:a="http://schemas.openxmlformats.org/drawingml/2006/main">
-          <a:blip xmlns:r="http://schemas.openxmlformats.org/officeDocument/2006/relationships" r:embed="R5f65b9dbd771492e">
+          <a:blip xmlns:r="http://schemas.openxmlformats.org/officeDocument/2006/relationships" r:embed="R49e37eaadabb407b">
             <a:alphaModFix/>
           </a:blip>
           <a:stretch>
@@ -23517,7 +23411,7 @@
           <p:nvPr/>
         </p:nvPicPr>
         <p:blipFill rotWithShape="1">
-          <a:blip xmlns:r="http://schemas.openxmlformats.org/officeDocument/2006/relationships" xmlns:a="http://schemas.openxmlformats.org/drawingml/2006/main" r:embed="R8880186c7a544aac">
+          <a:blip xmlns:r="http://schemas.openxmlformats.org/officeDocument/2006/relationships" xmlns:a="http://schemas.openxmlformats.org/drawingml/2006/main" r:embed="R27a023270c094897">
             <a:alphaModFix/>
           </a:blip>
           <a:srcRect xmlns:a="http://schemas.openxmlformats.org/drawingml/2006/main" l="0" t="0" r="0" b="0"/>
@@ -23547,7 +23441,7 @@
     <p:bg>
       <p:bgPr>
         <a:blipFill xmlns:a="http://schemas.openxmlformats.org/drawingml/2006/main">
-          <a:blip xmlns:r="http://schemas.openxmlformats.org/officeDocument/2006/relationships" r:embed="R27d6c28fd86c41ba">
+          <a:blip xmlns:r="http://schemas.openxmlformats.org/officeDocument/2006/relationships" r:embed="R4670b9d294b347f0">
             <a:alphaModFix/>
           </a:blip>
           <a:stretch>
@@ -24008,7 +23902,7 @@
           <p:nvPr/>
         </p:nvPicPr>
         <p:blipFill rotWithShape="1">
-          <a:blip xmlns:r="http://schemas.openxmlformats.org/officeDocument/2006/relationships" xmlns:a="http://schemas.openxmlformats.org/drawingml/2006/main" r:embed="Rcd524ea0234a44ae">
+          <a:blip xmlns:r="http://schemas.openxmlformats.org/officeDocument/2006/relationships" xmlns:a="http://schemas.openxmlformats.org/drawingml/2006/main" r:embed="R244a34891d57490f">
             <a:alphaModFix/>
           </a:blip>
           <a:srcRect xmlns:a="http://schemas.openxmlformats.org/drawingml/2006/main" l="0" t="0" r="0" b="0"/>
@@ -25720,22 +25614,22 @@
   </p:cSld>
   <p:clrMap bg1="lt1" tx1="dk1" bg2="dk2" tx2="lt2" accent1="accent1" accent2="accent2" accent3="accent3" accent4="accent4" accent5="accent5" accent6="accent6" hlink="hlink" folHlink="folHlink"/>
   <p:sldLayoutIdLst>
-    <p:sldLayoutId xmlns:r="http://schemas.openxmlformats.org/officeDocument/2006/relationships" id="2147483649" r:id="Rf90efaa80b704d22"/>
-    <p:sldLayoutId xmlns:r="http://schemas.openxmlformats.org/officeDocument/2006/relationships" id="2147483650" r:id="R72c1a5ea305b4ae4"/>
-    <p:sldLayoutId xmlns:r="http://schemas.openxmlformats.org/officeDocument/2006/relationships" id="2147483651" r:id="R541d221ce4c24585"/>
-    <p:sldLayoutId xmlns:r="http://schemas.openxmlformats.org/officeDocument/2006/relationships" id="2147483652" r:id="Re49acda7b5ff4e5a"/>
-    <p:sldLayoutId xmlns:r="http://schemas.openxmlformats.org/officeDocument/2006/relationships" id="2147483653" r:id="Rbf7d7e74905e4d76"/>
-    <p:sldLayoutId xmlns:r="http://schemas.openxmlformats.org/officeDocument/2006/relationships" id="2147483654" r:id="R51a23582ee0e4310"/>
-    <p:sldLayoutId xmlns:r="http://schemas.openxmlformats.org/officeDocument/2006/relationships" id="2147483655" r:id="Ra0a56db37cb64504"/>
-    <p:sldLayoutId xmlns:r="http://schemas.openxmlformats.org/officeDocument/2006/relationships" id="2147483656" r:id="R9e6772ef09c44a5f"/>
-    <p:sldLayoutId xmlns:r="http://schemas.openxmlformats.org/officeDocument/2006/relationships" id="2147483657" r:id="Reb8207498fe2454a"/>
-    <p:sldLayoutId xmlns:r="http://schemas.openxmlformats.org/officeDocument/2006/relationships" id="2147483658" r:id="R6011fc6453634c58"/>
-    <p:sldLayoutId xmlns:r="http://schemas.openxmlformats.org/officeDocument/2006/relationships" id="2147483659" r:id="R63918feed2cb4c05"/>
-    <p:sldLayoutId xmlns:r="http://schemas.openxmlformats.org/officeDocument/2006/relationships" id="2147483660" r:id="Rc829b14e1ec147e0"/>
-    <p:sldLayoutId xmlns:r="http://schemas.openxmlformats.org/officeDocument/2006/relationships" id="2147483661" r:id="R96ad61121ccd4311"/>
-    <p:sldLayoutId xmlns:r="http://schemas.openxmlformats.org/officeDocument/2006/relationships" id="2147483662" r:id="R6c3cda3d27704bb5"/>
-    <p:sldLayoutId xmlns:r="http://schemas.openxmlformats.org/officeDocument/2006/relationships" id="2147483663" r:id="Rbbfa0e85dcf14858"/>
-    <p:sldLayoutId xmlns:r="http://schemas.openxmlformats.org/officeDocument/2006/relationships" id="2147483664" r:id="Ra03eeaf1610b42d4"/>
+    <p:sldLayoutId xmlns:r="http://schemas.openxmlformats.org/officeDocument/2006/relationships" id="2147483649" r:id="Re82e3c28e75c4466"/>
+    <p:sldLayoutId xmlns:r="http://schemas.openxmlformats.org/officeDocument/2006/relationships" id="2147483650" r:id="Rc91a3a1926e74112"/>
+    <p:sldLayoutId xmlns:r="http://schemas.openxmlformats.org/officeDocument/2006/relationships" id="2147483651" r:id="R6c1096d08a404a30"/>
+    <p:sldLayoutId xmlns:r="http://schemas.openxmlformats.org/officeDocument/2006/relationships" id="2147483652" r:id="R98519f2fea614caf"/>
+    <p:sldLayoutId xmlns:r="http://schemas.openxmlformats.org/officeDocument/2006/relationships" id="2147483653" r:id="Ra5905a750ece4deb"/>
+    <p:sldLayoutId xmlns:r="http://schemas.openxmlformats.org/officeDocument/2006/relationships" id="2147483654" r:id="Rb8d02cb99e4e4b49"/>
+    <p:sldLayoutId xmlns:r="http://schemas.openxmlformats.org/officeDocument/2006/relationships" id="2147483655" r:id="R55208571b04940ab"/>
+    <p:sldLayoutId xmlns:r="http://schemas.openxmlformats.org/officeDocument/2006/relationships" id="2147483656" r:id="R4079aae300634678"/>
+    <p:sldLayoutId xmlns:r="http://schemas.openxmlformats.org/officeDocument/2006/relationships" id="2147483657" r:id="Reba08b9620f54fd1"/>
+    <p:sldLayoutId xmlns:r="http://schemas.openxmlformats.org/officeDocument/2006/relationships" id="2147483658" r:id="Rba1ee6431665406a"/>
+    <p:sldLayoutId xmlns:r="http://schemas.openxmlformats.org/officeDocument/2006/relationships" id="2147483659" r:id="Racebfdc48b9b4b16"/>
+    <p:sldLayoutId xmlns:r="http://schemas.openxmlformats.org/officeDocument/2006/relationships" id="2147483660" r:id="Rd71d84766a1642c2"/>
+    <p:sldLayoutId xmlns:r="http://schemas.openxmlformats.org/officeDocument/2006/relationships" id="2147483661" r:id="Re7e42c60d7fc4d91"/>
+    <p:sldLayoutId xmlns:r="http://schemas.openxmlformats.org/officeDocument/2006/relationships" id="2147483662" r:id="R6c5c7f8982eb4c0d"/>
+    <p:sldLayoutId xmlns:r="http://schemas.openxmlformats.org/officeDocument/2006/relationships" id="2147483663" r:id="R79e16540b3214337"/>
+    <p:sldLayoutId xmlns:r="http://schemas.openxmlformats.org/officeDocument/2006/relationships" id="2147483664" r:id="R079591d390064de8"/>
   </p:sldLayoutIdLst>
   <p:hf hdr="0" ftr="0" dt="0"/>
   <p:txStyles>
@@ -27928,7 +27822,7 @@
           <p:nvPr/>
         </p:nvPicPr>
         <p:blipFill rotWithShape="1">
-          <a:blip xmlns:r="http://schemas.openxmlformats.org/officeDocument/2006/relationships" xmlns:a="http://schemas.openxmlformats.org/drawingml/2006/main" r:embed="Rcfb63d318190491c">
+          <a:blip xmlns:r="http://schemas.openxmlformats.org/officeDocument/2006/relationships" xmlns:a="http://schemas.openxmlformats.org/drawingml/2006/main" r:embed="R947e671ab53d4632">
             <a:alphaModFix/>
           </a:blip>
           <a:srcRect xmlns:a="http://schemas.openxmlformats.org/drawingml/2006/main" l="0" t="0" r="0" b="0"/>
@@ -27951,19 +27845,19 @@
   </p:cSld>
   <p:clrMap bg1="lt1" tx1="dk1" bg2="dk2" tx2="lt2" accent1="accent1" accent2="accent2" accent3="accent3" accent4="accent4" accent5="accent5" accent6="accent6" hlink="hlink" folHlink="folHlink"/>
   <p:sldLayoutIdLst>
-    <p:sldLayoutId xmlns:r="http://schemas.openxmlformats.org/officeDocument/2006/relationships" id="2147483666" r:id="R778beb7ac7d640c6"/>
-    <p:sldLayoutId xmlns:r="http://schemas.openxmlformats.org/officeDocument/2006/relationships" id="2147483667" r:id="R654172767b2a43b7"/>
-    <p:sldLayoutId xmlns:r="http://schemas.openxmlformats.org/officeDocument/2006/relationships" id="2147483668" r:id="Rcd0a58b249b343a5"/>
-    <p:sldLayoutId xmlns:r="http://schemas.openxmlformats.org/officeDocument/2006/relationships" id="2147483669" r:id="Rdec1460f49674354"/>
-    <p:sldLayoutId xmlns:r="http://schemas.openxmlformats.org/officeDocument/2006/relationships" id="2147483670" r:id="Re7ba71c0fb9c42ce"/>
-    <p:sldLayoutId xmlns:r="http://schemas.openxmlformats.org/officeDocument/2006/relationships" id="2147483671" r:id="Rb39e424e828c4669"/>
-    <p:sldLayoutId xmlns:r="http://schemas.openxmlformats.org/officeDocument/2006/relationships" id="2147483672" r:id="Rd80356ba59d74229"/>
-    <p:sldLayoutId xmlns:r="http://schemas.openxmlformats.org/officeDocument/2006/relationships" id="2147483673" r:id="Rd518e37abf074624"/>
-    <p:sldLayoutId xmlns:r="http://schemas.openxmlformats.org/officeDocument/2006/relationships" id="2147483674" r:id="Rbfd0908c2d174f95"/>
-    <p:sldLayoutId xmlns:r="http://schemas.openxmlformats.org/officeDocument/2006/relationships" id="2147483675" r:id="Rb407097c5fe64b7b"/>
-    <p:sldLayoutId xmlns:r="http://schemas.openxmlformats.org/officeDocument/2006/relationships" id="2147483676" r:id="R0bf967d2de204a17"/>
-    <p:sldLayoutId xmlns:r="http://schemas.openxmlformats.org/officeDocument/2006/relationships" id="2147483677" r:id="R1ee7821d42d64f29"/>
-    <p:sldLayoutId xmlns:r="http://schemas.openxmlformats.org/officeDocument/2006/relationships" id="2147483678" r:id="R09b0effbb0d14d39"/>
+    <p:sldLayoutId xmlns:r="http://schemas.openxmlformats.org/officeDocument/2006/relationships" id="2147483666" r:id="R93934074ed824ea4"/>
+    <p:sldLayoutId xmlns:r="http://schemas.openxmlformats.org/officeDocument/2006/relationships" id="2147483667" r:id="Rb900f9284b774016"/>
+    <p:sldLayoutId xmlns:r="http://schemas.openxmlformats.org/officeDocument/2006/relationships" id="2147483668" r:id="R779b902fa2864a32"/>
+    <p:sldLayoutId xmlns:r="http://schemas.openxmlformats.org/officeDocument/2006/relationships" id="2147483669" r:id="Re3e3fca98e5a4485"/>
+    <p:sldLayoutId xmlns:r="http://schemas.openxmlformats.org/officeDocument/2006/relationships" id="2147483670" r:id="R00c26037d3c147a1"/>
+    <p:sldLayoutId xmlns:r="http://schemas.openxmlformats.org/officeDocument/2006/relationships" id="2147483671" r:id="R14ac5b4d8f9f4a98"/>
+    <p:sldLayoutId xmlns:r="http://schemas.openxmlformats.org/officeDocument/2006/relationships" id="2147483672" r:id="R7268d0a37e654938"/>
+    <p:sldLayoutId xmlns:r="http://schemas.openxmlformats.org/officeDocument/2006/relationships" id="2147483673" r:id="R9c39208c37004806"/>
+    <p:sldLayoutId xmlns:r="http://schemas.openxmlformats.org/officeDocument/2006/relationships" id="2147483674" r:id="Rc897a0dd3aaa4e99"/>
+    <p:sldLayoutId xmlns:r="http://schemas.openxmlformats.org/officeDocument/2006/relationships" id="2147483675" r:id="R6cd9ef096c9441d5"/>
+    <p:sldLayoutId xmlns:r="http://schemas.openxmlformats.org/officeDocument/2006/relationships" id="2147483676" r:id="R926c9d8e2e25483f"/>
+    <p:sldLayoutId xmlns:r="http://schemas.openxmlformats.org/officeDocument/2006/relationships" id="2147483677" r:id="R1fb5a5e94973435e"/>
+    <p:sldLayoutId xmlns:r="http://schemas.openxmlformats.org/officeDocument/2006/relationships" id="2147483678" r:id="Ra490a97fa61b4ad9"/>
   </p:sldLayoutIdLst>
   <p:hf hdr="0" ftr="0" dt="0"/>
   <p:txStyles>
@@ -29368,7 +29262,7 @@
           <a:lstStyle xmlns:a="http://schemas.openxmlformats.org/drawingml/2006/main"/>
           <a:p xmlns:a="http://schemas.openxmlformats.org/drawingml/2006/main">
             <a:r>
-              <a:t>Why this is useful to oneDNN at first glance</a:t>
+              <a:t>What the skill tells an agent today</a:t>
             </a:r>
           </a:p>
         </p:txBody>
@@ -29418,7 +29312,7 @@
                   <a:srgbClr val="000000"/>
                 </a:solidFill>
               </a:rPr>
-              <a:t> Protect the semantic boundary</a:t>
+              <a:t> Choose primitives versus graph deliberately</a:t>
             </a:r>
             <a:r>
               <a:rPr sz="1913">
@@ -29426,7 +29320,7 @@
                   <a:srgbClr val="000000"/>
                 </a:solidFill>
               </a:rPr>
-              <a:t> — Agents must state shapes, strides, data types, attributes, layout assumptions, and tolerances before tuning.</a:t>
+              <a:t> — Prefer explicit primitives for isolated control; use graph/fusion only after individual parity.</a:t>
             </a:r>
           </a:p>
           <a:p xmlns:a="http://schemas.openxmlformats.org/drawingml/2006/main">
@@ -29447,7 +29341,7 @@
                   <a:srgbClr val="000000"/>
                 </a:solidFill>
               </a:rPr>
-              <a:t> Prevent reorder-driven regressions</a:t>
+              <a:t> Construct memory descriptors explicitly</a:t>
             </a:r>
             <a:r>
               <a:rPr sz="1913">
@@ -29455,7 +29349,7 @@
                   <a:srgbClr val="000000"/>
                 </a:solidFill>
               </a:rPr>
-              <a:t> — The skill treats physical layout and reorder placement as part of design, not cleanup.</a:t>
+              <a:t> — Logical shape is not physical layout; optimized formats require intentional boundaries.</a:t>
             </a:r>
           </a:p>
           <a:p xmlns:a="http://schemas.openxmlformats.org/drawingml/2006/main">
@@ -29476,7 +29370,7 @@
                   <a:srgbClr val="000000"/>
                 </a:solidFill>
               </a:rPr>
-              <a:t> Make fusion claims testable</a:t>
+              <a:t> Classify benchdnn failures</a:t>
             </a:r>
             <a:r>
               <a:rPr sz="1913">
@@ -29484,7 +29378,7 @@
                   <a:srgbClr val="000000"/>
                 </a:solidFill>
               </a:rPr>
-              <a:t> — Build unfused parity first, then add post-ops or graph fusion and re-check.</a:t>
+              <a:t> — Separate create, reference-data, execute, compare, and report phases before editing code.</a:t>
             </a:r>
           </a:p>
           <a:p xmlns:a="http://schemas.openxmlformats.org/drawingml/2006/main">
@@ -29505,7 +29399,7 @@
                   <a:srgbClr val="000000"/>
                 </a:solidFill>
               </a:rPr>
-              <a:t> Use project-native evidence</a:t>
+              <a:t> Gate performance on correctness</a:t>
             </a:r>
             <a:r>
               <a:rPr sz="1913">
@@ -29513,7 +29407,36 @@
                   <a:srgbClr val="000000"/>
                 </a:solidFill>
               </a:rPr>
-              <a:t> — benchdnn modes, verbose implementation selection, existing tests, and representative shapes anchor the workflow.</a:t>
+              <a:t> — Record engine, mode, descriptor, selected implementation, baseline, and measurement environment.</a:t>
+            </a:r>
+          </a:p>
+          <a:p xmlns:a="http://schemas.openxmlformats.org/drawingml/2006/main">
+            <a:pPr marL="30" indent="-18">
+              <a:spcAft>
+                <a:spcPts val="10"/>
+              </a:spcAft>
+              <a:buChar char="•"/>
+              <a:defRPr sz="1913">
+                <a:solidFill>
+                  <a:srgbClr val="000000"/>
+                </a:solidFill>
+              </a:defRPr>
+            </a:pPr>
+            <a:r>
+              <a:rPr sz="1913" b="1">
+                <a:solidFill>
+                  <a:srgbClr val="000000"/>
+                </a:solidFill>
+              </a:rPr>
+              <a:t> Verify current backend support</a:t>
+            </a:r>
+            <a:r>
+              <a:rPr sz="1913">
+                <a:solidFill>
+                  <a:srgbClr val="000000"/>
+                </a:solidFill>
+              </a:rPr>
+              <a:t> — No static promise that a primitive or device path exists.</a:t>
             </a:r>
           </a:p>
         </p:txBody>
@@ -29605,7 +29528,7 @@
           <a:lstStyle xmlns:a="http://schemas.openxmlformats.org/drawingml/2006/main"/>
           <a:p xmlns:a="http://schemas.openxmlformats.org/drawingml/2006/main">
             <a:r>
-              <a:t>What the skill tells an agent today</a:t>
+              <a:t>Evaluation inventory: 5 implemented, 1 honest gap</a:t>
             </a:r>
           </a:p>
         </p:txBody>
@@ -29655,7 +29578,7 @@
                   <a:srgbClr val="000000"/>
                 </a:solidFill>
               </a:rPr>
-              <a:t> Choose primitives versus graph deliberately</a:t>
+              <a:t> Implemented</a:t>
             </a:r>
             <a:r>
               <a:rPr sz="1913">
@@ -29663,7 +29586,7 @@
                   <a:srgbClr val="000000"/>
                 </a:solidFill>
               </a:rPr>
-              <a:t> — Prefer explicit primitives for isolated control; use graph/fusion only after individual parity.</a:t>
+              <a:t> — Matmul memory descriptors; convolution fusion parity; extra reorder regression; framework blocked layout; benchdnn no-reference-memory incident.</a:t>
             </a:r>
           </a:p>
           <a:p xmlns:a="http://schemas.openxmlformats.org/drawingml/2006/main">
@@ -29684,7 +29607,7 @@
                   <a:srgbClr val="000000"/>
                 </a:solidFill>
               </a:rPr>
-              <a:t> Construct memory descriptors explicitly</a:t>
+              <a:t> Incident evidence</a:t>
             </a:r>
             <a:r>
               <a:rPr sz="1913">
@@ -29692,7 +29615,7 @@
                   <a:srgbClr val="000000"/>
                 </a:solidFill>
               </a:rPr>
-              <a:t> — Logical shape is not physical layout; optimized formats require intentional boundaries.</a:t>
+              <a:t> — benchdnn-no-ref-memory is sourced from upstream issue #5732 and its accepted repair.</a:t>
             </a:r>
           </a:p>
           <a:p xmlns:a="http://schemas.openxmlformats.org/drawingml/2006/main">
@@ -29713,7 +29636,7 @@
                   <a:srgbClr val="000000"/>
                 </a:solidFill>
               </a:rPr>
-              <a:t> Classify benchdnn failures</a:t>
+              <a:t> Planned</a:t>
             </a:r>
             <a:r>
               <a:rPr sz="1913">
@@ -29721,7 +29644,7 @@
                   <a:srgbClr val="000000"/>
                 </a:solidFill>
               </a:rPr>
-              <a:t> — Separate create, reference-data, execute, compare, and report phases before editing code.</a:t>
+              <a:t> — A real backend-unimplemented-primitive failure on a declared target device.</a:t>
             </a:r>
           </a:p>
           <a:p xmlns:a="http://schemas.openxmlformats.org/drawingml/2006/main">
@@ -29742,7 +29665,7 @@
                   <a:srgbClr val="000000"/>
                 </a:solidFill>
               </a:rPr>
-              <a:t> Gate performance on correctness</a:t>
+              <a:t> What this proves</a:t>
             </a:r>
             <a:r>
               <a:rPr sz="1913">
@@ -29750,36 +29673,7 @@
                   <a:srgbClr val="000000"/>
                 </a:solidFill>
               </a:rPr>
-              <a:t> — Record engine, mode, descriptor, selected implementation, baseline, and measurement environment.</a:t>
-            </a:r>
-          </a:p>
-          <a:p xmlns:a="http://schemas.openxmlformats.org/drawingml/2006/main">
-            <a:pPr marL="30" indent="-18">
-              <a:spcAft>
-                <a:spcPts val="10"/>
-              </a:spcAft>
-              <a:buChar char="•"/>
-              <a:defRPr sz="1913">
-                <a:solidFill>
-                  <a:srgbClr val="000000"/>
-                </a:solidFill>
-              </a:defRPr>
-            </a:pPr>
-            <a:r>
-              <a:rPr sz="1913" b="1">
-                <a:solidFill>
-                  <a:srgbClr val="000000"/>
-                </a:solidFill>
-              </a:rPr>
-              <a:t> Verify current backend support</a:t>
-            </a:r>
-            <a:r>
-              <a:rPr sz="1913">
-                <a:solidFill>
-                  <a:srgbClr val="000000"/>
-                </a:solidFill>
-              </a:rPr>
-              <a:t> — No static promise that a primitive or device path exists.</a:t>
+              <a:t> — The implemented tasks check workflow and repair behavior; they do not qualify every backend or primitive.</a:t>
             </a:r>
           </a:p>
         </p:txBody>
@@ -29871,7 +29765,7 @@
           <a:lstStyle xmlns:a="http://schemas.openxmlformats.org/drawingml/2006/main"/>
           <a:p xmlns:a="http://schemas.openxmlformats.org/drawingml/2006/main">
             <a:r>
-              <a:t>Evaluation inventory: 5 implemented, 1 honest gap</a:t>
+              <a:t>How we chose the content</a:t>
             </a:r>
           </a:p>
         </p:txBody>
@@ -29921,7 +29815,7 @@
                   <a:srgbClr val="000000"/>
                 </a:solidFill>
               </a:rPr>
-              <a:t> Implemented</a:t>
+              <a:t> Official oneDNN sources</a:t>
             </a:r>
             <a:r>
               <a:rPr sz="1913">
@@ -29929,7 +29823,7 @@
                   <a:srgbClr val="000000"/>
                 </a:solidFill>
               </a:rPr>
-              <a:t> — Matmul memory descriptors; convolution fusion parity; extra reorder regression; framework blocked layout; benchdnn no-reference-memory incident.</a:t>
+              <a:t> — Project docs, examples, tests, benchdnn behavior, releases, and ownership files.</a:t>
             </a:r>
           </a:p>
           <a:p xmlns:a="http://schemas.openxmlformats.org/drawingml/2006/main">
@@ -29950,7 +29844,7 @@
                   <a:srgbClr val="000000"/>
                 </a:solidFill>
               </a:rPr>
-              <a:t> Incident evidence</a:t>
+              <a:t> Failure-shaped scenarios</a:t>
             </a:r>
             <a:r>
               <a:rPr sz="1913">
@@ -29958,7 +29852,7 @@
                   <a:srgbClr val="000000"/>
                 </a:solidFill>
               </a:rPr>
-              <a:t> — benchdnn-no-ref-memory is sourced from upstream issue #5732 and its accepted repair.</a:t>
+              <a:t> — Layout mismatches, unnecessary reorders, fusion parity, framework boundaries, and harness-mode bugs.</a:t>
             </a:r>
           </a:p>
           <a:p xmlns:a="http://schemas.openxmlformats.org/drawingml/2006/main">
@@ -29979,7 +29873,7 @@
                   <a:srgbClr val="000000"/>
                 </a:solidFill>
               </a:rPr>
-              <a:t> Planned</a:t>
+              <a:t> A review standard</a:t>
             </a:r>
             <a:r>
               <a:rPr sz="1913">
@@ -29987,7 +29881,7 @@
                   <a:srgbClr val="000000"/>
                 </a:solidFill>
               </a:rPr>
-              <a:t> — A real backend-unimplemented-primitive failure on a declared target device.</a:t>
+              <a:t> — Realistic prompts, deterministic correctness checks, limitations, and current-source verification.</a:t>
             </a:r>
           </a:p>
           <a:p xmlns:a="http://schemas.openxmlformats.org/drawingml/2006/main">
@@ -30008,7 +29902,7 @@
                   <a:srgbClr val="000000"/>
                 </a:solidFill>
               </a:rPr>
-              <a:t> What this proves</a:t>
+              <a:t> Deliberate gaps</a:t>
             </a:r>
             <a:r>
               <a:rPr sz="1913">
@@ -30016,7 +29910,7 @@
                   <a:srgbClr val="000000"/>
                 </a:solidFill>
               </a:rPr>
-              <a:t> — The implemented tasks check workflow and repair behavior; they do not qualify every backend or primitive.</a:t>
+              <a:t> — Target-dependent support remains planned until a real environment and reproducer exist.</a:t>
             </a:r>
           </a:p>
         </p:txBody>
@@ -30108,7 +30002,7 @@
           <a:lstStyle xmlns:a="http://schemas.openxmlformats.org/drawingml/2006/main"/>
           <a:p xmlns:a="http://schemas.openxmlformats.org/drawingml/2006/main">
             <a:r>
-              <a:t>How we chose the content</a:t>
+              <a:t>What project ownership would look like</a:t>
             </a:r>
           </a:p>
         </p:txBody>
@@ -30158,7 +30052,7 @@
                   <a:srgbClr val="000000"/>
                 </a:solidFill>
               </a:rPr>
-              <a:t> Official oneDNN sources</a:t>
+              <a:t> Review a small surface</a:t>
             </a:r>
             <a:r>
               <a:rPr sz="1913">
@@ -30166,7 +30060,7 @@
                   <a:srgbClr val="000000"/>
                 </a:solidFill>
               </a:rPr>
-              <a:t> — Project docs, examples, tests, benchdnn behavior, releases, and ownership files.</a:t>
+              <a:t> — SKILL.md, official source ledger, public skill card, eval prompts, and the oneDNN task slice.</a:t>
             </a:r>
           </a:p>
           <a:p xmlns:a="http://schemas.openxmlformats.org/drawingml/2006/main">
@@ -30187,7 +30081,7 @@
                   <a:srgbClr val="000000"/>
                 </a:solidFill>
               </a:rPr>
-              <a:t> Failure-shaped scenarios</a:t>
+              <a:t> Change it through normal PRs</a:t>
             </a:r>
             <a:r>
               <a:rPr sz="1913">
@@ -30195,7 +30089,7 @@
                   <a:srgbClr val="000000"/>
                 </a:solidFill>
               </a:rPr>
-              <a:t> — Layout mismatches, unnecessary reorders, fusion parity, framework boundaries, and harness-mode bugs.</a:t>
+              <a:t> — Correct terminology, narrow triggers, add a gotcha, refresh sources, or retire an evaluation.</a:t>
             </a:r>
           </a:p>
           <a:p xmlns:a="http://schemas.openxmlformats.org/drawingml/2006/main">
@@ -30216,7 +30110,7 @@
                   <a:srgbClr val="000000"/>
                 </a:solidFill>
               </a:rPr>
-              <a:t> A review standard</a:t>
+              <a:t> UXL keeps the machinery</a:t>
             </a:r>
             <a:r>
               <a:rPr sz="1913">
@@ -30224,7 +30118,7 @@
                   <a:srgbClr val="000000"/>
                 </a:solidFill>
               </a:rPr>
-              <a:t> — Realistic prompts, deterministic correctness checks, limitations, and current-source verification.</a:t>
+              <a:t> — Common validators, Harbor execution, dashboards, and hardware-runner contracts stay shared.</a:t>
             </a:r>
           </a:p>
           <a:p xmlns:a="http://schemas.openxmlformats.org/drawingml/2006/main">
@@ -30245,7 +30139,7 @@
                   <a:srgbClr val="000000"/>
                 </a:solidFill>
               </a:rPr>
-              <a:t> Deliberate gaps</a:t>
+              <a:t> Promotion remains project-gated</a:t>
             </a:r>
             <a:r>
               <a:rPr sz="1913">
@@ -30253,7 +30147,7 @@
                   <a:srgbClr val="000000"/>
                 </a:solidFill>
               </a:rPr>
-              <a:t> — Target-dependent support remains planned until a real environment and reproducer exist.</a:t>
+              <a:t> — No reviewed/project-owned label without a maintainer decision and recorded limitations.</a:t>
             </a:r>
           </a:p>
         </p:txBody>
@@ -30345,243 +30239,6 @@
           <a:lstStyle xmlns:a="http://schemas.openxmlformats.org/drawingml/2006/main"/>
           <a:p xmlns:a="http://schemas.openxmlformats.org/drawingml/2006/main">
             <a:r>
-              <a:t>What project ownership would look like</a:t>
-            </a:r>
-          </a:p>
-        </p:txBody>
-      </p:sp>
-      <p:sp>
-        <p:nvSpPr>
-          <p:cNvPr id="3" name="Content Placeholder 2">
-            <a:extLst xmlns:a="http://schemas.openxmlformats.org/drawingml/2006/main">
-              <a:ext uri="{FF2B5EF4-FFF2-40B4-BE49-F238E27FC236}">
-                <a16:creationId xmlns:a16="http://schemas.microsoft.com/office/drawing/2014/main" id="{ECF5C9F1-2691-0BC9-F1E1-01CECB857FE3}"/>
-              </a:ext>
-            </a:extLst>
-          </p:cNvPr>
-          <p:cNvSpPr>
-            <a:spLocks xmlns:a="http://schemas.openxmlformats.org/drawingml/2006/main" noGrp="1"/>
-          </p:cNvSpPr>
-          <p:nvPr>
-            <p:ph type="body" idx="1"/>
-          </p:nvPr>
-        </p:nvSpPr>
-        <p:spPr>
-          <a:xfrm xmlns:a="http://schemas.openxmlformats.org/drawingml/2006/main">
-            <a:off x="838200" y="1825625"/>
-            <a:ext cx="10515600" cy="4351200"/>
-          </a:xfrm>
-        </p:spPr>
-        <p:txBody>
-          <a:bodyPr xmlns:a="http://schemas.openxmlformats.org/drawingml/2006/main" wrap="square" anchor="t">
-            <a:normAutofit fontScale="100000"/>
-          </a:bodyPr>
-          <a:lstStyle xmlns:a="http://schemas.openxmlformats.org/drawingml/2006/main"/>
-          <a:p xmlns:a="http://schemas.openxmlformats.org/drawingml/2006/main">
-            <a:pPr marL="30" indent="-18">
-              <a:spcAft>
-                <a:spcPts val="10"/>
-              </a:spcAft>
-              <a:buChar char="•"/>
-              <a:defRPr sz="1913">
-                <a:solidFill>
-                  <a:srgbClr val="000000"/>
-                </a:solidFill>
-              </a:defRPr>
-            </a:pPr>
-            <a:r>
-              <a:rPr sz="1913" b="1">
-                <a:solidFill>
-                  <a:srgbClr val="000000"/>
-                </a:solidFill>
-              </a:rPr>
-              <a:t> Review a small surface</a:t>
-            </a:r>
-            <a:r>
-              <a:rPr sz="1913">
-                <a:solidFill>
-                  <a:srgbClr val="000000"/>
-                </a:solidFill>
-              </a:rPr>
-              <a:t> — SKILL.md, official source ledger, public skill card, eval prompts, and the oneDNN task slice.</a:t>
-            </a:r>
-          </a:p>
-          <a:p xmlns:a="http://schemas.openxmlformats.org/drawingml/2006/main">
-            <a:pPr marL="30" indent="-18">
-              <a:spcAft>
-                <a:spcPts val="10"/>
-              </a:spcAft>
-              <a:buChar char="•"/>
-              <a:defRPr sz="1913">
-                <a:solidFill>
-                  <a:srgbClr val="000000"/>
-                </a:solidFill>
-              </a:defRPr>
-            </a:pPr>
-            <a:r>
-              <a:rPr sz="1913" b="1">
-                <a:solidFill>
-                  <a:srgbClr val="000000"/>
-                </a:solidFill>
-              </a:rPr>
-              <a:t> Change it through normal PRs</a:t>
-            </a:r>
-            <a:r>
-              <a:rPr sz="1913">
-                <a:solidFill>
-                  <a:srgbClr val="000000"/>
-                </a:solidFill>
-              </a:rPr>
-              <a:t> — Correct terminology, narrow triggers, add a gotcha, refresh sources, or retire an evaluation.</a:t>
-            </a:r>
-          </a:p>
-          <a:p xmlns:a="http://schemas.openxmlformats.org/drawingml/2006/main">
-            <a:pPr marL="30" indent="-18">
-              <a:spcAft>
-                <a:spcPts val="10"/>
-              </a:spcAft>
-              <a:buChar char="•"/>
-              <a:defRPr sz="1913">
-                <a:solidFill>
-                  <a:srgbClr val="000000"/>
-                </a:solidFill>
-              </a:defRPr>
-            </a:pPr>
-            <a:r>
-              <a:rPr sz="1913" b="1">
-                <a:solidFill>
-                  <a:srgbClr val="000000"/>
-                </a:solidFill>
-              </a:rPr>
-              <a:t> UXL keeps the machinery</a:t>
-            </a:r>
-            <a:r>
-              <a:rPr sz="1913">
-                <a:solidFill>
-                  <a:srgbClr val="000000"/>
-                </a:solidFill>
-              </a:rPr>
-              <a:t> — Common validators, Harbor execution, dashboards, and hardware-runner contracts stay shared.</a:t>
-            </a:r>
-          </a:p>
-          <a:p xmlns:a="http://schemas.openxmlformats.org/drawingml/2006/main">
-            <a:pPr marL="30" indent="-18">
-              <a:spcAft>
-                <a:spcPts val="10"/>
-              </a:spcAft>
-              <a:buChar char="•"/>
-              <a:defRPr sz="1913">
-                <a:solidFill>
-                  <a:srgbClr val="000000"/>
-                </a:solidFill>
-              </a:defRPr>
-            </a:pPr>
-            <a:r>
-              <a:rPr sz="1913" b="1">
-                <a:solidFill>
-                  <a:srgbClr val="000000"/>
-                </a:solidFill>
-              </a:rPr>
-              <a:t> Promotion remains project-gated</a:t>
-            </a:r>
-            <a:r>
-              <a:rPr sz="1913">
-                <a:solidFill>
-                  <a:srgbClr val="000000"/>
-                </a:solidFill>
-              </a:rPr>
-              <a:t> — No reviewed/project-owned label without a maintainer decision and recorded limitations.</a:t>
-            </a:r>
-          </a:p>
-        </p:txBody>
-      </p:sp>
-      <p:sp>
-        <p:nvSpPr>
-          <p:cNvPr id="7" name="TextBox 6">
-            <a:extLst xmlns:a="http://schemas.openxmlformats.org/drawingml/2006/main">
-              <a:ext uri="{FF2B5EF4-FFF2-40B4-BE49-F238E27FC236}">
-                <a16:creationId xmlns:a16="http://schemas.microsoft.com/office/drawing/2014/main" id="{E2E6F043-0F84-54F7-A567-6E5851801779}"/>
-              </a:ext>
-            </a:extLst>
-          </p:cNvPr>
-          <p:cNvSpPr>
-            <a:spLocks xmlns:a="http://schemas.openxmlformats.org/drawingml/2006/main" noGrp="1"/>
-          </p:cNvSpPr>
-          <p:nvPr/>
-        </p:nvSpPr>
-        <p:spPr>
-          <a:xfrm xmlns:a="http://schemas.openxmlformats.org/drawingml/2006/main">
-            <a:off x="696174" y="6338986"/>
-            <a:ext cx="284052" cy="307777"/>
-          </a:xfrm>
-          <a:prstGeom xmlns:a="http://schemas.openxmlformats.org/drawingml/2006/main" prst="rect">
-            <a:avLst/>
-          </a:prstGeom>
-          <a:noFill xmlns:a="http://schemas.openxmlformats.org/drawingml/2006/main"/>
-        </p:spPr>
-        <p:txBody>
-          <a:bodyPr xmlns:a="http://schemas.openxmlformats.org/drawingml/2006/main" wrap="none">
-            <a:spAutoFit/>
-          </a:bodyPr>
-          <a:lstStyle xmlns:a="http://schemas.openxmlformats.org/drawingml/2006/main"/>
-          <a:p xmlns:a="http://schemas.openxmlformats.org/drawingml/2006/main">
-            <a:r>
-              <a:t>6</a:t>
-            </a:r>
-          </a:p>
-        </p:txBody>
-      </p:sp>
-    </p:spTree>
-    <p:extLst>
-      <p:ext uri="{BB962C8B-B14F-4D97-AF65-F5344CB8AC3E}">
-        <p14:creationId xmlns:p14="http://schemas.microsoft.com/office/powerpoint/2010/main" val="1742728663"/>
-      </p:ext>
-    </p:extLst>
-  </p:cSld>
-</p:sld>
-</file>
-
-<file path=ppt/slides/slide7.xml><?xml version="1.0" encoding="utf-8"?>
-<p:sld xmlns:p="http://schemas.openxmlformats.org/presentationml/2006/main">
-  <p:cSld>
-    <p:spTree>
-      <p:nvGrpSpPr>
-        <p:cNvPr id="1" name=""/>
-        <p:cNvGrpSpPr/>
-        <p:nvPr/>
-      </p:nvGrpSpPr>
-      <p:grpSpPr>
-        <a:xfrm xmlns:a="http://schemas.openxmlformats.org/drawingml/2006/main"/>
-      </p:grpSpPr>
-      <p:sp>
-        <p:nvSpPr>
-          <p:cNvPr id="2" name="Title 1">
-            <a:extLst xmlns:a="http://schemas.openxmlformats.org/drawingml/2006/main">
-              <a:ext uri="{FF2B5EF4-FFF2-40B4-BE49-F238E27FC236}">
-                <a16:creationId xmlns:a16="http://schemas.microsoft.com/office/drawing/2014/main" id="{F64C2A24-546D-C55C-2C52-97A4957F67E0}"/>
-              </a:ext>
-            </a:extLst>
-          </p:cNvPr>
-          <p:cNvSpPr>
-            <a:spLocks xmlns:a="http://schemas.openxmlformats.org/drawingml/2006/main" noGrp="1"/>
-          </p:cNvSpPr>
-          <p:nvPr>
-            <p:ph type="title" idx="0"/>
-          </p:nvPr>
-        </p:nvSpPr>
-        <p:spPr>
-          <a:xfrm xmlns:a="http://schemas.openxmlformats.org/drawingml/2006/main">
-            <a:off x="838200" y="365125"/>
-            <a:ext cx="10515600" cy="1325700"/>
-          </a:xfrm>
-        </p:spPr>
-        <p:txBody>
-          <a:bodyPr xmlns:a="http://schemas.openxmlformats.org/drawingml/2006/main">
-            <a:normAutofit fontScale="100000"/>
-          </a:bodyPr>
-          <a:lstStyle xmlns:a="http://schemas.openxmlformats.org/drawingml/2006/main"/>
-          <a:p xmlns:a="http://schemas.openxmlformats.org/drawingml/2006/main">
-            <a:r>
               <a:t>A focused 30-minute maintainer review</a:t>
             </a:r>
           </a:p>
@@ -30792,7 +30449,7 @@
           <a:lstStyle xmlns:a="http://schemas.openxmlformats.org/drawingml/2006/main"/>
           <a:p xmlns:a="http://schemas.openxmlformats.org/drawingml/2006/main">
             <a:r>
-              <a:t>7</a:t>
+              <a:t>6</a:t>
             </a:r>
           </a:p>
         </p:txBody>

--- a/evaluation/dashboard/public/decks/uxl-onednn-maintainer-briefing.pptx
+++ b/evaluation/dashboard/public/decks/uxl-onednn-maintainer-briefing.pptx
@@ -2,19 +2,19 @@
 <file path=ppt/presentation.xml><?xml version="1.0" encoding="utf-8"?>
 <p:presentation xmlns:p="http://schemas.openxmlformats.org/presentationml/2006/main">
   <p:sldMasterIdLst>
-    <p:sldMasterId xmlns:r="http://schemas.openxmlformats.org/officeDocument/2006/relationships" id="2147483648" r:id="Rd6795c5cc81c4911"/>
-    <p:sldMasterId xmlns:r="http://schemas.openxmlformats.org/officeDocument/2006/relationships" id="2147483665" r:id="R4cd733412c68464b"/>
+    <p:sldMasterId xmlns:r="http://schemas.openxmlformats.org/officeDocument/2006/relationships" id="2147483648" r:id="R56341e50206947a6"/>
+    <p:sldMasterId xmlns:r="http://schemas.openxmlformats.org/officeDocument/2006/relationships" id="2147483665" r:id="R766a815c2d284cad"/>
   </p:sldMasterIdLst>
   <p:notesMasterIdLst>
-    <p:notesMasterId xmlns:r="http://schemas.openxmlformats.org/officeDocument/2006/relationships" r:id="Rd644cd14a89f47db"/>
+    <p:notesMasterId xmlns:r="http://schemas.openxmlformats.org/officeDocument/2006/relationships" r:id="R94a0621746eb4137"/>
   </p:notesMasterIdLst>
   <p:sldIdLst>
-    <p:sldId xmlns:r="http://schemas.openxmlformats.org/officeDocument/2006/relationships" id="256" r:id="R54ee7843c9564143"/>
-    <p:sldId xmlns:r="http://schemas.openxmlformats.org/officeDocument/2006/relationships" id="257" r:id="R266d59f542ec4151"/>
-    <p:sldId xmlns:r="http://schemas.openxmlformats.org/officeDocument/2006/relationships" id="258" r:id="R2de3ade53eb640e0"/>
-    <p:sldId xmlns:r="http://schemas.openxmlformats.org/officeDocument/2006/relationships" id="259" r:id="Rb80754d677a64495"/>
-    <p:sldId xmlns:r="http://schemas.openxmlformats.org/officeDocument/2006/relationships" id="260" r:id="R0e0c4ad72274489e"/>
-    <p:sldId xmlns:r="http://schemas.openxmlformats.org/officeDocument/2006/relationships" id="261" r:id="R4a654da48a1547d8"/>
+    <p:sldId xmlns:r="http://schemas.openxmlformats.org/officeDocument/2006/relationships" id="256" r:id="R8b625dccf3364c56"/>
+    <p:sldId xmlns:r="http://schemas.openxmlformats.org/officeDocument/2006/relationships" id="257" r:id="Rc66a0f10acea433e"/>
+    <p:sldId xmlns:r="http://schemas.openxmlformats.org/officeDocument/2006/relationships" id="258" r:id="R49a05d16aca54e8a"/>
+    <p:sldId xmlns:r="http://schemas.openxmlformats.org/officeDocument/2006/relationships" id="259" r:id="Rebee00a03e104d70"/>
+    <p:sldId xmlns:r="http://schemas.openxmlformats.org/officeDocument/2006/relationships" id="260" r:id="R59697b70a6da492d"/>
+    <p:sldId xmlns:r="http://schemas.openxmlformats.org/officeDocument/2006/relationships" id="261" r:id="Rba888a2dd8d84d1a"/>
   </p:sldIdLst>
   <p:sldSz cx="12192000" cy="6858000"/>
   <p:notesSz cx="6858000" cy="9144000"/>
@@ -503,6 +503,11 @@
           </a:p>
           <a:p xmlns:a="http://schemas.openxmlformats.org/drawingml/2006/main">
             <a:r>
+              <a:t>- https://github.com/uxlfoundation/skills/blob/main/evaluation/harbor/EVALUATOR_POLICY.md</a:t>
+            </a:r>
+          </a:p>
+          <a:p xmlns:a="http://schemas.openxmlformats.org/drawingml/2006/main">
+            <a:r>
               <a:t>[/Sources]</a:t>
             </a:r>
           </a:p>
@@ -513,7 +518,22 @@
           </a:p>
           <a:p xmlns:a="http://schemas.openxmlformats.org/drawingml/2006/main">
             <a:r>
-              <a:t>Speaker cue: oneDNN skill: make agent changes reviewable</a:t>
+              <a:t>Presenter guidance</a:t>
+            </a:r>
+          </a:p>
+          <a:p xmlns:a="http://schemas.openxmlformats.org/drawingml/2006/main">
+            <a:r>
+              <a:t>Purpose: Introduce the draft oneDNN skill and its current evaluation coverage.</a:t>
+            </a:r>
+          </a:p>
+          <a:p xmlns:a="http://schemas.openxmlformats.org/drawingml/2006/main">
+            <a:r>
+              <a:t>Explain: The skill helps coding agents reason about primitive and graph selection, memory descriptors and reorders, fusion parity, numeric checks, and benchdnn-based diagnosis.</a:t>
+            </a:r>
+          </a:p>
+          <a:p xmlns:a="http://schemas.openxmlformats.org/drawingml/2006/main">
+            <a:r>
+              <a:t>Emphasize: This is a UXL-authored starting point awaiting project review, not approved maintainer guidance.</a:t>
             </a:r>
           </a:p>
         </p:txBody>
@@ -608,6 +628,11 @@
           </a:p>
           <a:p xmlns:a="http://schemas.openxmlformats.org/drawingml/2006/main">
             <a:r>
+              <a:t>- https://github.com/uxlfoundation/skills/blob/main/evaluation/harbor/EVALUATOR_POLICY.md</a:t>
+            </a:r>
+          </a:p>
+          <a:p xmlns:a="http://schemas.openxmlformats.org/drawingml/2006/main">
+            <a:r>
               <a:t>[/Sources]</a:t>
             </a:r>
           </a:p>
@@ -618,7 +643,22 @@
           </a:p>
           <a:p xmlns:a="http://schemas.openxmlformats.org/drawingml/2006/main">
             <a:r>
-              <a:t>Speaker cue: What the skill tells an agent today</a:t>
+              <a:t>Presenter guidance</a:t>
+            </a:r>
+          </a:p>
+          <a:p xmlns:a="http://schemas.openxmlformats.org/drawingml/2006/main">
+            <a:r>
+              <a:t>Purpose: Walk through the behavior the skill asks an agent to follow today.</a:t>
+            </a:r>
+          </a:p>
+          <a:p xmlns:a="http://schemas.openxmlformats.org/drawingml/2006/main">
+            <a:r>
+              <a:t>Explain: The intended sequence is to start from operation semantics, make layouts explicit, compare primitive and graph paths, isolate reorder cost, and finish with a reproducible correctness check.</a:t>
+            </a:r>
+          </a:p>
+          <a:p xmlns:a="http://schemas.openxmlformats.org/drawingml/2006/main">
+            <a:r>
+              <a:t>Emphasize: A useful answer ends with reproducible evidence and a clear failure classification, not a plausible-looking command alone.</a:t>
             </a:r>
           </a:p>
         </p:txBody>
@@ -713,6 +753,11 @@
           </a:p>
           <a:p xmlns:a="http://schemas.openxmlformats.org/drawingml/2006/main">
             <a:r>
+              <a:t>- https://github.com/uxlfoundation/skills/blob/main/evaluation/harbor/EVALUATOR_POLICY.md</a:t>
+            </a:r>
+          </a:p>
+          <a:p xmlns:a="http://schemas.openxmlformats.org/drawingml/2006/main">
+            <a:r>
               <a:t>[/Sources]</a:t>
             </a:r>
           </a:p>
@@ -723,7 +768,22 @@
           </a:p>
           <a:p xmlns:a="http://schemas.openxmlformats.org/drawingml/2006/main">
             <a:r>
-              <a:t>Speaker cue: Evaluation inventory: 5 implemented, 1 honest gap</a:t>
+              <a:t>Presenter guidance</a:t>
+            </a:r>
+          </a:p>
+          <a:p xmlns:a="http://schemas.openxmlformats.org/drawingml/2006/main">
+            <a:r>
+              <a:t>Purpose: Separate evaluation inventory from evidence that the skill improves outcomes.</a:t>
+            </a:r>
+          </a:p>
+          <a:p xmlns:a="http://schemas.openxmlformats.org/drawingml/2006/main">
+            <a:r>
+              <a:t>Explain: 5 of 6 evaluation tasks are implemented; five runnable scenarios cover core integration risks; the remaining framework/regression scenario needs a more authentic fixture.</a:t>
+            </a:r>
+          </a:p>
+          <a:p xmlns:a="http://schemas.openxmlformats.org/drawingml/2006/main">
+            <a:r>
+              <a:t>Emphasize: Implemented means the task can run. It does not mean the task passes, discriminates between treatments, or supports a promotion claim.</a:t>
             </a:r>
           </a:p>
         </p:txBody>
@@ -818,6 +878,11 @@
           </a:p>
           <a:p xmlns:a="http://schemas.openxmlformats.org/drawingml/2006/main">
             <a:r>
+              <a:t>- https://github.com/uxlfoundation/skills/blob/main/evaluation/harbor/EVALUATOR_POLICY.md</a:t>
+            </a:r>
+          </a:p>
+          <a:p xmlns:a="http://schemas.openxmlformats.org/drawingml/2006/main">
+            <a:r>
               <a:t>[/Sources]</a:t>
             </a:r>
           </a:p>
@@ -828,7 +893,22 @@
           </a:p>
           <a:p xmlns:a="http://schemas.openxmlformats.org/drawingml/2006/main">
             <a:r>
-              <a:t>Speaker cue: How we chose the content</a:t>
+              <a:t>Presenter guidance</a:t>
+            </a:r>
+          </a:p>
+          <a:p xmlns:a="http://schemas.openxmlformats.org/drawingml/2006/main">
+            <a:r>
+              <a:t>Purpose: Show how the draft guidance and task set were selected.</a:t>
+            </a:r>
+          </a:p>
+          <a:p xmlns:a="http://schemas.openxmlformats.org/drawingml/2006/main">
+            <a:r>
+              <a:t>Explain: The starting material comes from official oneDNN documentation, examples, tests, and recurring descriptor, reorder, fusion, scratchpad, and blocked-layout failure boundaries.</a:t>
+            </a:r>
+          </a:p>
+          <a:p xmlns:a="http://schemas.openxmlformats.org/drawingml/2006/main">
+            <a:r>
+              <a:t>Emphasize: Maintainers should correct, remove, or replace anything that does not reflect current project practice.</a:t>
             </a:r>
           </a:p>
         </p:txBody>
@@ -923,6 +1003,11 @@
           </a:p>
           <a:p xmlns:a="http://schemas.openxmlformats.org/drawingml/2006/main">
             <a:r>
+              <a:t>- https://github.com/uxlfoundation/skills/blob/main/evaluation/harbor/EVALUATOR_POLICY.md</a:t>
+            </a:r>
+          </a:p>
+          <a:p xmlns:a="http://schemas.openxmlformats.org/drawingml/2006/main">
+            <a:r>
               <a:t>[/Sources]</a:t>
             </a:r>
           </a:p>
@@ -933,7 +1018,22 @@
           </a:p>
           <a:p xmlns:a="http://schemas.openxmlformats.org/drawingml/2006/main">
             <a:r>
-              <a:t>Speaker cue: What project ownership would look like</a:t>
+              <a:t>Presenter guidance</a:t>
+            </a:r>
+          </a:p>
+          <a:p xmlns:a="http://schemas.openxmlformats.org/drawingml/2006/main">
+            <a:r>
+              <a:t>Purpose: Clarify the proposed ownership boundary.</a:t>
+            </a:r>
+          </a:p>
+          <a:p xmlns:a="http://schemas.openxmlformats.org/drawingml/2006/main">
+            <a:r>
+              <a:t>Explain: oneDNN maintainers own triggers, API truth, source freshness, limitations, and authentic cases; UXL maintains the catalog, Harbor integration, comparison design, and dashboard.</a:t>
+            </a:r>
+          </a:p>
+          <a:p xmlns:a="http://schemas.openxmlformats.org/drawingml/2006/main">
+            <a:r>
+              <a:t>Emphasize: The skill cannot move beyond its incubating state without named project review.</a:t>
             </a:r>
           </a:p>
         </p:txBody>
@@ -1028,6 +1128,11 @@
           </a:p>
           <a:p xmlns:a="http://schemas.openxmlformats.org/drawingml/2006/main">
             <a:r>
+              <a:t>- https://github.com/uxlfoundation/skills/blob/main/evaluation/harbor/EVALUATOR_POLICY.md</a:t>
+            </a:r>
+          </a:p>
+          <a:p xmlns:a="http://schemas.openxmlformats.org/drawingml/2006/main">
+            <a:r>
               <a:t>[/Sources]</a:t>
             </a:r>
           </a:p>
@@ -1038,7 +1143,22 @@
           </a:p>
           <a:p xmlns:a="http://schemas.openxmlformats.org/drawingml/2006/main">
             <a:r>
-              <a:t>Speaker cue: A focused 30-minute maintainer review</a:t>
+              <a:t>Presenter guidance</a:t>
+            </a:r>
+          </a:p>
+          <a:p xmlns:a="http://schemas.openxmlformats.org/drawingml/2006/main">
+            <a:r>
+              <a:t>Purpose: End with a small, concrete review request.</a:t>
+            </a:r>
+          </a:p>
+          <a:p xmlns:a="http://schemas.openxmlformats.org/drawingml/2006/main">
+            <a:r>
+              <a:t>Explain: Ask maintainers to check the trigger and technical guidance, judge the task inventory, and name a reviewer or owner.</a:t>
+            </a:r>
+          </a:p>
+          <a:p xmlns:a="http://schemas.openxmlformats.org/drawingml/2006/main">
+            <a:r>
+              <a:t>Emphasize: The desired output is specific corrections and realistic cases, not blanket endorsement of the draft.</a:t>
             </a:r>
           </a:p>
         </p:txBody>
@@ -1074,7 +1194,7 @@
     <p:bg>
       <p:bgPr>
         <a:blipFill xmlns:a="http://schemas.openxmlformats.org/drawingml/2006/main">
-          <a:blip xmlns:r="http://schemas.openxmlformats.org/officeDocument/2006/relationships" r:embed="R07c2f19dcfd04ffe">
+          <a:blip xmlns:r="http://schemas.openxmlformats.org/officeDocument/2006/relationships" r:embed="R7336b8ea9e694981">
             <a:alphaModFix/>
           </a:blip>
           <a:stretch>
@@ -1509,7 +1629,7 @@
           <p:nvPr/>
         </p:nvPicPr>
         <p:blipFill rotWithShape="1">
-          <a:blip xmlns:r="http://schemas.openxmlformats.org/officeDocument/2006/relationships" xmlns:a="http://schemas.openxmlformats.org/drawingml/2006/main" r:embed="R898ae0159eab4657">
+          <a:blip xmlns:r="http://schemas.openxmlformats.org/officeDocument/2006/relationships" xmlns:a="http://schemas.openxmlformats.org/drawingml/2006/main" r:embed="Ree1b88a16ad640b2">
             <a:alphaModFix/>
           </a:blip>
           <a:srcRect xmlns:a="http://schemas.openxmlformats.org/drawingml/2006/main" l="0" t="0" r="0" b="0"/>
@@ -1539,7 +1659,7 @@
     <p:bg>
       <p:bgPr>
         <a:blipFill xmlns:a="http://schemas.openxmlformats.org/drawingml/2006/main">
-          <a:blip xmlns:r="http://schemas.openxmlformats.org/officeDocument/2006/relationships" r:embed="R7fc7392b8ff645a6">
+          <a:blip xmlns:r="http://schemas.openxmlformats.org/officeDocument/2006/relationships" r:embed="Rfbbd1ac5e44b49d0">
             <a:alphaModFix/>
           </a:blip>
           <a:stretch>
@@ -2573,7 +2693,7 @@
           <p:nvPr/>
         </p:nvPicPr>
         <p:blipFill rotWithShape="1">
-          <a:blip xmlns:r="http://schemas.openxmlformats.org/officeDocument/2006/relationships" xmlns:a="http://schemas.openxmlformats.org/drawingml/2006/main" r:embed="Rf5ab2bee4aed49b1">
+          <a:blip xmlns:r="http://schemas.openxmlformats.org/officeDocument/2006/relationships" xmlns:a="http://schemas.openxmlformats.org/drawingml/2006/main" r:embed="R939c3d2398084e48">
             <a:alphaModFix/>
           </a:blip>
           <a:srcRect xmlns:a="http://schemas.openxmlformats.org/drawingml/2006/main" l="0" t="0" r="0" b="0"/>
@@ -3597,7 +3717,7 @@
           <p:nvPr/>
         </p:nvPicPr>
         <p:blipFill rotWithShape="1">
-          <a:blip xmlns:r="http://schemas.openxmlformats.org/officeDocument/2006/relationships" xmlns:a="http://schemas.openxmlformats.org/drawingml/2006/main" r:embed="Rd0f3deb44092408b">
+          <a:blip xmlns:r="http://schemas.openxmlformats.org/officeDocument/2006/relationships" xmlns:a="http://schemas.openxmlformats.org/drawingml/2006/main" r:embed="Rfca8bfeb675b44e7">
             <a:alphaModFix/>
           </a:blip>
           <a:srcRect xmlns:a="http://schemas.openxmlformats.org/drawingml/2006/main" l="0" t="0" r="0" b="0"/>
@@ -3627,7 +3747,7 @@
     <p:bg>
       <p:bgPr>
         <a:blipFill xmlns:a="http://schemas.openxmlformats.org/drawingml/2006/main">
-          <a:blip xmlns:r="http://schemas.openxmlformats.org/officeDocument/2006/relationships" r:embed="R2101135c1cbf4430">
+          <a:blip xmlns:r="http://schemas.openxmlformats.org/officeDocument/2006/relationships" r:embed="R05b9e5e1486a42d8">
             <a:alphaModFix/>
           </a:blip>
           <a:stretch>
@@ -4901,7 +5021,7 @@
           <p:nvPr/>
         </p:nvPicPr>
         <p:blipFill rotWithShape="1">
-          <a:blip xmlns:r="http://schemas.openxmlformats.org/officeDocument/2006/relationships" xmlns:a="http://schemas.openxmlformats.org/drawingml/2006/main" r:embed="Ra7803394a379485d">
+          <a:blip xmlns:r="http://schemas.openxmlformats.org/officeDocument/2006/relationships" xmlns:a="http://schemas.openxmlformats.org/drawingml/2006/main" r:embed="R34982eda8f3f4ff1">
             <a:alphaModFix/>
           </a:blip>
           <a:srcRect xmlns:a="http://schemas.openxmlformats.org/drawingml/2006/main" l="0" t="0" r="0" b="0"/>
@@ -8145,7 +8265,7 @@
           <p:nvPr/>
         </p:nvPicPr>
         <p:blipFill rotWithShape="1">
-          <a:blip xmlns:r="http://schemas.openxmlformats.org/officeDocument/2006/relationships" xmlns:a="http://schemas.openxmlformats.org/drawingml/2006/main" r:embed="R5266cc39b1914b62">
+          <a:blip xmlns:r="http://schemas.openxmlformats.org/officeDocument/2006/relationships" xmlns:a="http://schemas.openxmlformats.org/drawingml/2006/main" r:embed="R5cc22b34e4bc4ee4">
             <a:alphaModFix/>
           </a:blip>
           <a:srcRect xmlns:a="http://schemas.openxmlformats.org/drawingml/2006/main" l="0" t="0" r="0" b="0"/>
@@ -9883,7 +10003,7 @@
           <p:nvPr/>
         </p:nvPicPr>
         <p:blipFill rotWithShape="1">
-          <a:blip xmlns:r="http://schemas.openxmlformats.org/officeDocument/2006/relationships" xmlns:a="http://schemas.openxmlformats.org/drawingml/2006/main" r:embed="R11fa2d2b8d7e4498">
+          <a:blip xmlns:r="http://schemas.openxmlformats.org/officeDocument/2006/relationships" xmlns:a="http://schemas.openxmlformats.org/drawingml/2006/main" r:embed="Rd08eab71c046452a">
             <a:alphaModFix/>
           </a:blip>
           <a:srcRect xmlns:a="http://schemas.openxmlformats.org/drawingml/2006/main" l="0" t="0" r="0" b="0"/>
@@ -16712,7 +16832,7 @@
     <p:bg>
       <p:bgPr>
         <a:blipFill xmlns:a="http://schemas.openxmlformats.org/drawingml/2006/main">
-          <a:blip xmlns:r="http://schemas.openxmlformats.org/officeDocument/2006/relationships" r:embed="Re4d5c989497b4dc4">
+          <a:blip xmlns:r="http://schemas.openxmlformats.org/officeDocument/2006/relationships" r:embed="R3e5d83d3f40645ed">
             <a:alphaModFix/>
           </a:blip>
           <a:stretch>
@@ -17147,7 +17267,7 @@
           <p:nvPr/>
         </p:nvPicPr>
         <p:blipFill rotWithShape="1">
-          <a:blip xmlns:r="http://schemas.openxmlformats.org/officeDocument/2006/relationships" xmlns:a="http://schemas.openxmlformats.org/drawingml/2006/main" r:embed="R780d07d36af94edc">
+          <a:blip xmlns:r="http://schemas.openxmlformats.org/officeDocument/2006/relationships" xmlns:a="http://schemas.openxmlformats.org/drawingml/2006/main" r:embed="Re5fbaa2d010749fd">
             <a:alphaModFix/>
           </a:blip>
           <a:srcRect xmlns:a="http://schemas.openxmlformats.org/drawingml/2006/main" l="0" t="0" r="0" b="0"/>
@@ -17177,7 +17297,7 @@
     <p:bg>
       <p:bgPr>
         <a:blipFill xmlns:a="http://schemas.openxmlformats.org/drawingml/2006/main">
-          <a:blip xmlns:r="http://schemas.openxmlformats.org/officeDocument/2006/relationships" r:embed="R81954e6a259a4e08">
+          <a:blip xmlns:r="http://schemas.openxmlformats.org/officeDocument/2006/relationships" r:embed="Raf925bca109a4a23">
             <a:alphaModFix/>
           </a:blip>
           <a:stretch>
@@ -17810,7 +17930,7 @@
           <p:nvPr/>
         </p:nvPicPr>
         <p:blipFill rotWithShape="1">
-          <a:blip xmlns:r="http://schemas.openxmlformats.org/officeDocument/2006/relationships" xmlns:a="http://schemas.openxmlformats.org/drawingml/2006/main" r:embed="R98ce9d68c31347ce">
+          <a:blip xmlns:r="http://schemas.openxmlformats.org/officeDocument/2006/relationships" xmlns:a="http://schemas.openxmlformats.org/drawingml/2006/main" r:embed="R74e165463ba84cd7">
             <a:alphaModFix/>
           </a:blip>
           <a:srcRect xmlns:a="http://schemas.openxmlformats.org/drawingml/2006/main" l="0" t="0" r="0" b="0"/>
@@ -18270,7 +18390,7 @@
     <p:bg>
       <p:bgPr>
         <a:blipFill xmlns:a="http://schemas.openxmlformats.org/drawingml/2006/main">
-          <a:blip xmlns:r="http://schemas.openxmlformats.org/officeDocument/2006/relationships" r:embed="R4f1269770cba4e6a">
+          <a:blip xmlns:r="http://schemas.openxmlformats.org/officeDocument/2006/relationships" r:embed="R7912d438cf7f4801">
             <a:alphaModFix/>
           </a:blip>
           <a:stretch>
@@ -18903,7 +19023,7 @@
           <p:nvPr/>
         </p:nvPicPr>
         <p:blipFill rotWithShape="1">
-          <a:blip xmlns:r="http://schemas.openxmlformats.org/officeDocument/2006/relationships" xmlns:a="http://schemas.openxmlformats.org/drawingml/2006/main" r:embed="R28eb6379b7024d78">
+          <a:blip xmlns:r="http://schemas.openxmlformats.org/officeDocument/2006/relationships" xmlns:a="http://schemas.openxmlformats.org/drawingml/2006/main" r:embed="R512fc58dfe044334">
             <a:alphaModFix/>
           </a:blip>
           <a:srcRect xmlns:a="http://schemas.openxmlformats.org/drawingml/2006/main" l="0" t="0" r="0" b="0"/>
@@ -21559,7 +21679,7 @@
           <p:nvPr/>
         </p:nvPicPr>
         <p:blipFill rotWithShape="1">
-          <a:blip xmlns:r="http://schemas.openxmlformats.org/officeDocument/2006/relationships" xmlns:a="http://schemas.openxmlformats.org/drawingml/2006/main" r:embed="R085d0573cfad4a10">
+          <a:blip xmlns:r="http://schemas.openxmlformats.org/officeDocument/2006/relationships" xmlns:a="http://schemas.openxmlformats.org/drawingml/2006/main" r:embed="R4f343771b04d48de">
             <a:alphaModFix/>
           </a:blip>
           <a:srcRect xmlns:a="http://schemas.openxmlformats.org/drawingml/2006/main" l="0" t="0" r="0" b="0"/>
@@ -21589,7 +21709,7 @@
     <p:bg>
       <p:bgPr>
         <a:blipFill xmlns:a="http://schemas.openxmlformats.org/drawingml/2006/main">
-          <a:blip xmlns:r="http://schemas.openxmlformats.org/officeDocument/2006/relationships" r:embed="Rdd73b954025f4cb0">
+          <a:blip xmlns:r="http://schemas.openxmlformats.org/officeDocument/2006/relationships" r:embed="Rb5be2cdb807d434a">
             <a:alphaModFix/>
           </a:blip>
           <a:stretch>
@@ -22433,7 +22553,7 @@
           <p:nvPr/>
         </p:nvPicPr>
         <p:blipFill rotWithShape="1">
-          <a:blip xmlns:r="http://schemas.openxmlformats.org/officeDocument/2006/relationships" xmlns:a="http://schemas.openxmlformats.org/drawingml/2006/main" r:embed="R47c95dde93ac484a">
+          <a:blip xmlns:r="http://schemas.openxmlformats.org/officeDocument/2006/relationships" xmlns:a="http://schemas.openxmlformats.org/drawingml/2006/main" r:embed="R98a3942fa74e43e1">
             <a:alphaModFix/>
           </a:blip>
           <a:srcRect xmlns:a="http://schemas.openxmlformats.org/drawingml/2006/main" l="0" t="0" r="0" b="0"/>
@@ -22463,7 +22583,7 @@
     <p:bg>
       <p:bgPr>
         <a:blipFill xmlns:a="http://schemas.openxmlformats.org/drawingml/2006/main">
-          <a:blip xmlns:r="http://schemas.openxmlformats.org/officeDocument/2006/relationships" r:embed="R49e37eaadabb407b">
+          <a:blip xmlns:r="http://schemas.openxmlformats.org/officeDocument/2006/relationships" r:embed="R548943a6942d40b3">
             <a:alphaModFix/>
           </a:blip>
           <a:stretch>
@@ -23411,7 +23531,7 @@
           <p:nvPr/>
         </p:nvPicPr>
         <p:blipFill rotWithShape="1">
-          <a:blip xmlns:r="http://schemas.openxmlformats.org/officeDocument/2006/relationships" xmlns:a="http://schemas.openxmlformats.org/drawingml/2006/main" r:embed="R27a023270c094897">
+          <a:blip xmlns:r="http://schemas.openxmlformats.org/officeDocument/2006/relationships" xmlns:a="http://schemas.openxmlformats.org/drawingml/2006/main" r:embed="R8c6de15869384ecb">
             <a:alphaModFix/>
           </a:blip>
           <a:srcRect xmlns:a="http://schemas.openxmlformats.org/drawingml/2006/main" l="0" t="0" r="0" b="0"/>
@@ -23441,7 +23561,7 @@
     <p:bg>
       <p:bgPr>
         <a:blipFill xmlns:a="http://schemas.openxmlformats.org/drawingml/2006/main">
-          <a:blip xmlns:r="http://schemas.openxmlformats.org/officeDocument/2006/relationships" r:embed="R4670b9d294b347f0">
+          <a:blip xmlns:r="http://schemas.openxmlformats.org/officeDocument/2006/relationships" r:embed="R8d42e4541d454e8c">
             <a:alphaModFix/>
           </a:blip>
           <a:stretch>
@@ -23902,7 +24022,7 @@
           <p:nvPr/>
         </p:nvPicPr>
         <p:blipFill rotWithShape="1">
-          <a:blip xmlns:r="http://schemas.openxmlformats.org/officeDocument/2006/relationships" xmlns:a="http://schemas.openxmlformats.org/drawingml/2006/main" r:embed="R244a34891d57490f">
+          <a:blip xmlns:r="http://schemas.openxmlformats.org/officeDocument/2006/relationships" xmlns:a="http://schemas.openxmlformats.org/drawingml/2006/main" r:embed="Rf8d129d45929422c">
             <a:alphaModFix/>
           </a:blip>
           <a:srcRect xmlns:a="http://schemas.openxmlformats.org/drawingml/2006/main" l="0" t="0" r="0" b="0"/>
@@ -25614,22 +25734,22 @@
   </p:cSld>
   <p:clrMap bg1="lt1" tx1="dk1" bg2="dk2" tx2="lt2" accent1="accent1" accent2="accent2" accent3="accent3" accent4="accent4" accent5="accent5" accent6="accent6" hlink="hlink" folHlink="folHlink"/>
   <p:sldLayoutIdLst>
-    <p:sldLayoutId xmlns:r="http://schemas.openxmlformats.org/officeDocument/2006/relationships" id="2147483649" r:id="Re82e3c28e75c4466"/>
-    <p:sldLayoutId xmlns:r="http://schemas.openxmlformats.org/officeDocument/2006/relationships" id="2147483650" r:id="Rc91a3a1926e74112"/>
-    <p:sldLayoutId xmlns:r="http://schemas.openxmlformats.org/officeDocument/2006/relationships" id="2147483651" r:id="R6c1096d08a404a30"/>
-    <p:sldLayoutId xmlns:r="http://schemas.openxmlformats.org/officeDocument/2006/relationships" id="2147483652" r:id="R98519f2fea614caf"/>
-    <p:sldLayoutId xmlns:r="http://schemas.openxmlformats.org/officeDocument/2006/relationships" id="2147483653" r:id="Ra5905a750ece4deb"/>
-    <p:sldLayoutId xmlns:r="http://schemas.openxmlformats.org/officeDocument/2006/relationships" id="2147483654" r:id="Rb8d02cb99e4e4b49"/>
-    <p:sldLayoutId xmlns:r="http://schemas.openxmlformats.org/officeDocument/2006/relationships" id="2147483655" r:id="R55208571b04940ab"/>
-    <p:sldLayoutId xmlns:r="http://schemas.openxmlformats.org/officeDocument/2006/relationships" id="2147483656" r:id="R4079aae300634678"/>
-    <p:sldLayoutId xmlns:r="http://schemas.openxmlformats.org/officeDocument/2006/relationships" id="2147483657" r:id="Reba08b9620f54fd1"/>
-    <p:sldLayoutId xmlns:r="http://schemas.openxmlformats.org/officeDocument/2006/relationships" id="2147483658" r:id="Rba1ee6431665406a"/>
-    <p:sldLayoutId xmlns:r="http://schemas.openxmlformats.org/officeDocument/2006/relationships" id="2147483659" r:id="Racebfdc48b9b4b16"/>
-    <p:sldLayoutId xmlns:r="http://schemas.openxmlformats.org/officeDocument/2006/relationships" id="2147483660" r:id="Rd71d84766a1642c2"/>
-    <p:sldLayoutId xmlns:r="http://schemas.openxmlformats.org/officeDocument/2006/relationships" id="2147483661" r:id="Re7e42c60d7fc4d91"/>
-    <p:sldLayoutId xmlns:r="http://schemas.openxmlformats.org/officeDocument/2006/relationships" id="2147483662" r:id="R6c5c7f8982eb4c0d"/>
-    <p:sldLayoutId xmlns:r="http://schemas.openxmlformats.org/officeDocument/2006/relationships" id="2147483663" r:id="R79e16540b3214337"/>
-    <p:sldLayoutId xmlns:r="http://schemas.openxmlformats.org/officeDocument/2006/relationships" id="2147483664" r:id="R079591d390064de8"/>
+    <p:sldLayoutId xmlns:r="http://schemas.openxmlformats.org/officeDocument/2006/relationships" id="2147483649" r:id="R65d9f14ba2e946e6"/>
+    <p:sldLayoutId xmlns:r="http://schemas.openxmlformats.org/officeDocument/2006/relationships" id="2147483650" r:id="R863b0a863cfa450b"/>
+    <p:sldLayoutId xmlns:r="http://schemas.openxmlformats.org/officeDocument/2006/relationships" id="2147483651" r:id="R3b821b99bf704db9"/>
+    <p:sldLayoutId xmlns:r="http://schemas.openxmlformats.org/officeDocument/2006/relationships" id="2147483652" r:id="R3158fed30c9c4980"/>
+    <p:sldLayoutId xmlns:r="http://schemas.openxmlformats.org/officeDocument/2006/relationships" id="2147483653" r:id="R10cefa88d1f7451a"/>
+    <p:sldLayoutId xmlns:r="http://schemas.openxmlformats.org/officeDocument/2006/relationships" id="2147483654" r:id="Re7411dbde4ef4a67"/>
+    <p:sldLayoutId xmlns:r="http://schemas.openxmlformats.org/officeDocument/2006/relationships" id="2147483655" r:id="R2569a27c74a24d9f"/>
+    <p:sldLayoutId xmlns:r="http://schemas.openxmlformats.org/officeDocument/2006/relationships" id="2147483656" r:id="R964c333001d7497a"/>
+    <p:sldLayoutId xmlns:r="http://schemas.openxmlformats.org/officeDocument/2006/relationships" id="2147483657" r:id="R4de2992147104962"/>
+    <p:sldLayoutId xmlns:r="http://schemas.openxmlformats.org/officeDocument/2006/relationships" id="2147483658" r:id="R35aa6dc58c2b48e9"/>
+    <p:sldLayoutId xmlns:r="http://schemas.openxmlformats.org/officeDocument/2006/relationships" id="2147483659" r:id="R0adc3067c2fd4329"/>
+    <p:sldLayoutId xmlns:r="http://schemas.openxmlformats.org/officeDocument/2006/relationships" id="2147483660" r:id="R8683bf8e4c5d400f"/>
+    <p:sldLayoutId xmlns:r="http://schemas.openxmlformats.org/officeDocument/2006/relationships" id="2147483661" r:id="R19fdd6f620874314"/>
+    <p:sldLayoutId xmlns:r="http://schemas.openxmlformats.org/officeDocument/2006/relationships" id="2147483662" r:id="Rf569f4cd8379481d"/>
+    <p:sldLayoutId xmlns:r="http://schemas.openxmlformats.org/officeDocument/2006/relationships" id="2147483663" r:id="R3f7fc20d48aa41db"/>
+    <p:sldLayoutId xmlns:r="http://schemas.openxmlformats.org/officeDocument/2006/relationships" id="2147483664" r:id="R839cb4d092c84e29"/>
   </p:sldLayoutIdLst>
   <p:hf hdr="0" ftr="0" dt="0"/>
   <p:txStyles>
@@ -27822,7 +27942,7 @@
           <p:nvPr/>
         </p:nvPicPr>
         <p:blipFill rotWithShape="1">
-          <a:blip xmlns:r="http://schemas.openxmlformats.org/officeDocument/2006/relationships" xmlns:a="http://schemas.openxmlformats.org/drawingml/2006/main" r:embed="R947e671ab53d4632">
+          <a:blip xmlns:r="http://schemas.openxmlformats.org/officeDocument/2006/relationships" xmlns:a="http://schemas.openxmlformats.org/drawingml/2006/main" r:embed="R2cd8b364cb844321">
             <a:alphaModFix/>
           </a:blip>
           <a:srcRect xmlns:a="http://schemas.openxmlformats.org/drawingml/2006/main" l="0" t="0" r="0" b="0"/>
@@ -27845,19 +27965,19 @@
   </p:cSld>
   <p:clrMap bg1="lt1" tx1="dk1" bg2="dk2" tx2="lt2" accent1="accent1" accent2="accent2" accent3="accent3" accent4="accent4" accent5="accent5" accent6="accent6" hlink="hlink" folHlink="folHlink"/>
   <p:sldLayoutIdLst>
-    <p:sldLayoutId xmlns:r="http://schemas.openxmlformats.org/officeDocument/2006/relationships" id="2147483666" r:id="R93934074ed824ea4"/>
-    <p:sldLayoutId xmlns:r="http://schemas.openxmlformats.org/officeDocument/2006/relationships" id="2147483667" r:id="Rb900f9284b774016"/>
-    <p:sldLayoutId xmlns:r="http://schemas.openxmlformats.org/officeDocument/2006/relationships" id="2147483668" r:id="R779b902fa2864a32"/>
-    <p:sldLayoutId xmlns:r="http://schemas.openxmlformats.org/officeDocument/2006/relationships" id="2147483669" r:id="Re3e3fca98e5a4485"/>
-    <p:sldLayoutId xmlns:r="http://schemas.openxmlformats.org/officeDocument/2006/relationships" id="2147483670" r:id="R00c26037d3c147a1"/>
-    <p:sldLayoutId xmlns:r="http://schemas.openxmlformats.org/officeDocument/2006/relationships" id="2147483671" r:id="R14ac5b4d8f9f4a98"/>
-    <p:sldLayoutId xmlns:r="http://schemas.openxmlformats.org/officeDocument/2006/relationships" id="2147483672" r:id="R7268d0a37e654938"/>
-    <p:sldLayoutId xmlns:r="http://schemas.openxmlformats.org/officeDocument/2006/relationships" id="2147483673" r:id="R9c39208c37004806"/>
-    <p:sldLayoutId xmlns:r="http://schemas.openxmlformats.org/officeDocument/2006/relationships" id="2147483674" r:id="Rc897a0dd3aaa4e99"/>
-    <p:sldLayoutId xmlns:r="http://schemas.openxmlformats.org/officeDocument/2006/relationships" id="2147483675" r:id="R6cd9ef096c9441d5"/>
-    <p:sldLayoutId xmlns:r="http://schemas.openxmlformats.org/officeDocument/2006/relationships" id="2147483676" r:id="R926c9d8e2e25483f"/>
-    <p:sldLayoutId xmlns:r="http://schemas.openxmlformats.org/officeDocument/2006/relationships" id="2147483677" r:id="R1fb5a5e94973435e"/>
-    <p:sldLayoutId xmlns:r="http://schemas.openxmlformats.org/officeDocument/2006/relationships" id="2147483678" r:id="Ra490a97fa61b4ad9"/>
+    <p:sldLayoutId xmlns:r="http://schemas.openxmlformats.org/officeDocument/2006/relationships" id="2147483666" r:id="R995f7554a1a84464"/>
+    <p:sldLayoutId xmlns:r="http://schemas.openxmlformats.org/officeDocument/2006/relationships" id="2147483667" r:id="R8ffabaebae644992"/>
+    <p:sldLayoutId xmlns:r="http://schemas.openxmlformats.org/officeDocument/2006/relationships" id="2147483668" r:id="R6a39c22a9c744190"/>
+    <p:sldLayoutId xmlns:r="http://schemas.openxmlformats.org/officeDocument/2006/relationships" id="2147483669" r:id="Rbadeaedb403844cb"/>
+    <p:sldLayoutId xmlns:r="http://schemas.openxmlformats.org/officeDocument/2006/relationships" id="2147483670" r:id="R5a610fbee74949e3"/>
+    <p:sldLayoutId xmlns:r="http://schemas.openxmlformats.org/officeDocument/2006/relationships" id="2147483671" r:id="Ree22addc3ff54dfd"/>
+    <p:sldLayoutId xmlns:r="http://schemas.openxmlformats.org/officeDocument/2006/relationships" id="2147483672" r:id="R5223fa5030be417b"/>
+    <p:sldLayoutId xmlns:r="http://schemas.openxmlformats.org/officeDocument/2006/relationships" id="2147483673" r:id="R026ab58136164aba"/>
+    <p:sldLayoutId xmlns:r="http://schemas.openxmlformats.org/officeDocument/2006/relationships" id="2147483674" r:id="R72acf4c389614937"/>
+    <p:sldLayoutId xmlns:r="http://schemas.openxmlformats.org/officeDocument/2006/relationships" id="2147483675" r:id="R27d20656611f4e6e"/>
+    <p:sldLayoutId xmlns:r="http://schemas.openxmlformats.org/officeDocument/2006/relationships" id="2147483676" r:id="Rd00af143fb3944cc"/>
+    <p:sldLayoutId xmlns:r="http://schemas.openxmlformats.org/officeDocument/2006/relationships" id="2147483677" r:id="Rd027975a02c2466a"/>
+    <p:sldLayoutId xmlns:r="http://schemas.openxmlformats.org/officeDocument/2006/relationships" id="2147483678" r:id="R0d804efae3184655"/>
   </p:sldLayoutIdLst>
   <p:hf hdr="0" ftr="0" dt="0"/>
   <p:txStyles>
